--- a/Презентация 0.2.pptx
+++ b/Презентация 0.2.pptx
@@ -5,7 +5,7 @@
     <p:sldMasterId id="2147483648" r:id="rId1"/>
   </p:sldMasterIdLst>
   <p:notesMasterIdLst>
-    <p:notesMasterId r:id="rId28"/>
+    <p:notesMasterId r:id="rId31"/>
   </p:notesMasterIdLst>
   <p:sldIdLst>
     <p:sldId id="256" r:id="rId2"/>
@@ -26,14 +26,17 @@
     <p:sldId id="275" r:id="rId17"/>
     <p:sldId id="369" r:id="rId18"/>
     <p:sldId id="368" r:id="rId19"/>
-    <p:sldId id="376" r:id="rId20"/>
-    <p:sldId id="378" r:id="rId21"/>
-    <p:sldId id="377" r:id="rId22"/>
-    <p:sldId id="382" r:id="rId23"/>
-    <p:sldId id="366" r:id="rId24"/>
-    <p:sldId id="370" r:id="rId25"/>
-    <p:sldId id="375" r:id="rId26"/>
-    <p:sldId id="381" r:id="rId27"/>
+    <p:sldId id="385" r:id="rId20"/>
+    <p:sldId id="376" r:id="rId21"/>
+    <p:sldId id="378" r:id="rId22"/>
+    <p:sldId id="377" r:id="rId23"/>
+    <p:sldId id="382" r:id="rId24"/>
+    <p:sldId id="366" r:id="rId25"/>
+    <p:sldId id="370" r:id="rId26"/>
+    <p:sldId id="384" r:id="rId27"/>
+    <p:sldId id="383" r:id="rId28"/>
+    <p:sldId id="375" r:id="rId29"/>
+    <p:sldId id="381" r:id="rId30"/>
   </p:sldIdLst>
   <p:sldSz cx="12192000" cy="6858000"/>
   <p:notesSz cx="6858000" cy="9144000"/>
@@ -222,7 +225,7 @@
           <a:p>
             <a:fld id="{C3A986FF-C254-4F4D-970E-EBA5E0147EDB}" type="datetimeFigureOut">
               <a:rPr lang="en-US" smtClean="0"/>
-              <a:t>4/24/2026</a:t>
+              <a:t>6/11/2026</a:t>
             </a:fld>
             <a:endParaRPr lang="en-US"/>
           </a:p>
@@ -1789,7 +1792,7 @@
         <p:cNvPr id="1" name="">
           <a:extLst>
             <a:ext uri="{FF2B5EF4-FFF2-40B4-BE49-F238E27FC236}">
-              <a16:creationId xmlns:a16="http://schemas.microsoft.com/office/drawing/2014/main" id="{4223D2A7-C4EB-06C0-52A1-C73F48660E6B}"/>
+              <a16:creationId xmlns:a16="http://schemas.microsoft.com/office/drawing/2014/main" id="{88420B7F-3068-B946-6606-104E642E2D79}"/>
             </a:ext>
           </a:extLst>
         </p:cNvPr>
@@ -1809,7 +1812,7 @@
           <p:cNvPr id="2" name="Образ слайда 1">
             <a:extLst>
               <a:ext uri="{FF2B5EF4-FFF2-40B4-BE49-F238E27FC236}">
-                <a16:creationId xmlns:a16="http://schemas.microsoft.com/office/drawing/2014/main" id="{285CAF40-5C06-5D62-0C62-81C682A6717E}"/>
+                <a16:creationId xmlns:a16="http://schemas.microsoft.com/office/drawing/2014/main" id="{60247554-4CD6-3F26-90B9-1D2ED27D4463}"/>
               </a:ext>
             </a:extLst>
           </p:cNvPr>
@@ -1827,7 +1830,7 @@
           <p:cNvPr id="3" name="Заметки 2">
             <a:extLst>
               <a:ext uri="{FF2B5EF4-FFF2-40B4-BE49-F238E27FC236}">
-                <a16:creationId xmlns:a16="http://schemas.microsoft.com/office/drawing/2014/main" id="{FACDCEE7-FDDF-6423-FA0C-DC5B64B0696D}"/>
+                <a16:creationId xmlns:a16="http://schemas.microsoft.com/office/drawing/2014/main" id="{94A10A04-C949-E452-BCB5-D0BA33F7A37F}"/>
               </a:ext>
             </a:extLst>
           </p:cNvPr>
@@ -1843,14 +1846,7 @@
           <a:bodyPr/>
           <a:lstStyle/>
           <a:p>
-            <a:r>
-              <a:rPr lang="ru-RU" dirty="0"/>
-              <a:t>Перед вами представлена блок схема алгоритма </a:t>
-            </a:r>
-            <a:r>
-              <a:rPr lang="en-US" dirty="0"/>
-              <a:t>GJO</a:t>
-            </a:r>
+            <a:endParaRPr lang="en-US" dirty="0"/>
           </a:p>
         </p:txBody>
       </p:sp>
@@ -1859,7 +1855,7 @@
           <p:cNvPr id="4" name="Номер слайда 3">
             <a:extLst>
               <a:ext uri="{FF2B5EF4-FFF2-40B4-BE49-F238E27FC236}">
-                <a16:creationId xmlns:a16="http://schemas.microsoft.com/office/drawing/2014/main" id="{C57E7C1C-4B18-DE4F-764B-A954A4F9028A}"/>
+                <a16:creationId xmlns:a16="http://schemas.microsoft.com/office/drawing/2014/main" id="{228E3DBC-F91C-3D0A-4387-5BD283E116B4}"/>
               </a:ext>
             </a:extLst>
           </p:cNvPr>
@@ -1886,7 +1882,7 @@
     </p:spTree>
     <p:extLst>
       <p:ext uri="{BB962C8B-B14F-4D97-AF65-F5344CB8AC3E}">
-        <p14:creationId xmlns:p14="http://schemas.microsoft.com/office/powerpoint/2010/main" val="38393056"/>
+        <p14:creationId xmlns:p14="http://schemas.microsoft.com/office/powerpoint/2010/main" val="1511983995"/>
       </p:ext>
     </p:extLst>
   </p:cSld>
@@ -2068,6 +2064,121 @@
         <p:cNvPr id="1" name="">
           <a:extLst>
             <a:ext uri="{FF2B5EF4-FFF2-40B4-BE49-F238E27FC236}">
+              <a16:creationId xmlns:a16="http://schemas.microsoft.com/office/drawing/2014/main" id="{4223D2A7-C4EB-06C0-52A1-C73F48660E6B}"/>
+            </a:ext>
+          </a:extLst>
+        </p:cNvPr>
+        <p:cNvGrpSpPr/>
+        <p:nvPr/>
+      </p:nvGrpSpPr>
+      <p:grpSpPr>
+        <a:xfrm>
+          <a:off x="0" y="0"/>
+          <a:ext cx="0" cy="0"/>
+          <a:chOff x="0" y="0"/>
+          <a:chExt cx="0" cy="0"/>
+        </a:xfrm>
+      </p:grpSpPr>
+      <p:sp>
+        <p:nvSpPr>
+          <p:cNvPr id="2" name="Образ слайда 1">
+            <a:extLst>
+              <a:ext uri="{FF2B5EF4-FFF2-40B4-BE49-F238E27FC236}">
+                <a16:creationId xmlns:a16="http://schemas.microsoft.com/office/drawing/2014/main" id="{285CAF40-5C06-5D62-0C62-81C682A6717E}"/>
+              </a:ext>
+            </a:extLst>
+          </p:cNvPr>
+          <p:cNvSpPr>
+            <a:spLocks noGrp="1" noRot="1" noChangeAspect="1"/>
+          </p:cNvSpPr>
+          <p:nvPr>
+            <p:ph type="sldImg"/>
+          </p:nvPr>
+        </p:nvSpPr>
+        <p:spPr/>
+      </p:sp>
+      <p:sp>
+        <p:nvSpPr>
+          <p:cNvPr id="3" name="Заметки 2">
+            <a:extLst>
+              <a:ext uri="{FF2B5EF4-FFF2-40B4-BE49-F238E27FC236}">
+                <a16:creationId xmlns:a16="http://schemas.microsoft.com/office/drawing/2014/main" id="{FACDCEE7-FDDF-6423-FA0C-DC5B64B0696D}"/>
+              </a:ext>
+            </a:extLst>
+          </p:cNvPr>
+          <p:cNvSpPr>
+            <a:spLocks noGrp="1"/>
+          </p:cNvSpPr>
+          <p:nvPr>
+            <p:ph type="body" idx="1"/>
+          </p:nvPr>
+        </p:nvSpPr>
+        <p:spPr/>
+        <p:txBody>
+          <a:bodyPr/>
+          <a:lstStyle/>
+          <a:p>
+            <a:r>
+              <a:rPr lang="ru-RU" dirty="0"/>
+              <a:t>Перед вами представлена блок схема алгоритма </a:t>
+            </a:r>
+            <a:r>
+              <a:rPr lang="en-US" dirty="0"/>
+              <a:t>GJO</a:t>
+            </a:r>
+          </a:p>
+        </p:txBody>
+      </p:sp>
+      <p:sp>
+        <p:nvSpPr>
+          <p:cNvPr id="4" name="Номер слайда 3">
+            <a:extLst>
+              <a:ext uri="{FF2B5EF4-FFF2-40B4-BE49-F238E27FC236}">
+                <a16:creationId xmlns:a16="http://schemas.microsoft.com/office/drawing/2014/main" id="{C57E7C1C-4B18-DE4F-764B-A954A4F9028A}"/>
+              </a:ext>
+            </a:extLst>
+          </p:cNvPr>
+          <p:cNvSpPr>
+            <a:spLocks noGrp="1"/>
+          </p:cNvSpPr>
+          <p:nvPr>
+            <p:ph type="sldNum" sz="quarter" idx="5"/>
+          </p:nvPr>
+        </p:nvSpPr>
+        <p:spPr/>
+        <p:txBody>
+          <a:bodyPr/>
+          <a:lstStyle/>
+          <a:p>
+            <a:fld id="{63122E3D-766E-4CE8-99C1-DB828FEDFC03}" type="slidenum">
+              <a:rPr lang="en-US" smtClean="0"/>
+              <a:t>20</a:t>
+            </a:fld>
+            <a:endParaRPr lang="en-US"/>
+          </a:p>
+        </p:txBody>
+      </p:sp>
+    </p:spTree>
+    <p:extLst>
+      <p:ext uri="{BB962C8B-B14F-4D97-AF65-F5344CB8AC3E}">
+        <p14:creationId xmlns:p14="http://schemas.microsoft.com/office/powerpoint/2010/main" val="38393056"/>
+      </p:ext>
+    </p:extLst>
+  </p:cSld>
+  <p:clrMapOvr>
+    <a:masterClrMapping/>
+  </p:clrMapOvr>
+</p:notes>
+</file>
+
+<file path=ppt/notesSlides/notesSlide21.xml><?xml version="1.0" encoding="utf-8"?>
+<p:notes xmlns:a="http://schemas.openxmlformats.org/drawingml/2006/main" xmlns:r="http://schemas.openxmlformats.org/officeDocument/2006/relationships" xmlns:p="http://schemas.openxmlformats.org/presentationml/2006/main">
+  <p:cSld>
+    <p:spTree>
+      <p:nvGrpSpPr>
+        <p:cNvPr id="1" name="">
+          <a:extLst>
+            <a:ext uri="{FF2B5EF4-FFF2-40B4-BE49-F238E27FC236}">
               <a16:creationId xmlns:a16="http://schemas.microsoft.com/office/drawing/2014/main" id="{73A82C8F-34FB-8F7F-2D82-8BB25A90086F}"/>
             </a:ext>
           </a:extLst>
@@ -2169,7 +2280,7 @@
           <a:p>
             <a:fld id="{63122E3D-766E-4CE8-99C1-DB828FEDFC03}" type="slidenum">
               <a:rPr lang="en-US" smtClean="0"/>
-              <a:t>20</a:t>
+              <a:t>21</a:t>
             </a:fld>
             <a:endParaRPr lang="en-US"/>
           </a:p>
@@ -2188,7 +2299,7 @@
 </p:notes>
 </file>
 
-<file path=ppt/notesSlides/notesSlide21.xml><?xml version="1.0" encoding="utf-8"?>
+<file path=ppt/notesSlides/notesSlide22.xml><?xml version="1.0" encoding="utf-8"?>
 <p:notes xmlns:a="http://schemas.openxmlformats.org/drawingml/2006/main" xmlns:r="http://schemas.openxmlformats.org/officeDocument/2006/relationships" xmlns:p="http://schemas.openxmlformats.org/presentationml/2006/main">
   <p:cSld>
     <p:spTree>
@@ -2313,7 +2424,7 @@
           <a:p>
             <a:fld id="{63122E3D-766E-4CE8-99C1-DB828FEDFC03}" type="slidenum">
               <a:rPr lang="en-US" smtClean="0"/>
-              <a:t>21</a:t>
+              <a:t>22</a:t>
             </a:fld>
             <a:endParaRPr lang="en-US"/>
           </a:p>
@@ -2332,7 +2443,7 @@
 </p:notes>
 </file>
 
-<file path=ppt/notesSlides/notesSlide22.xml><?xml version="1.0" encoding="utf-8"?>
+<file path=ppt/notesSlides/notesSlide23.xml><?xml version="1.0" encoding="utf-8"?>
 <p:notes xmlns:a="http://schemas.openxmlformats.org/drawingml/2006/main" xmlns:r="http://schemas.openxmlformats.org/officeDocument/2006/relationships" xmlns:p="http://schemas.openxmlformats.org/presentationml/2006/main">
   <p:cSld>
     <p:spTree>
@@ -2425,7 +2536,7 @@
           <a:p>
             <a:fld id="{63122E3D-766E-4CE8-99C1-DB828FEDFC03}" type="slidenum">
               <a:rPr lang="en-US" smtClean="0"/>
-              <a:t>22</a:t>
+              <a:t>23</a:t>
             </a:fld>
             <a:endParaRPr lang="en-US"/>
           </a:p>
@@ -2435,94 +2546,6 @@
     <p:extLst>
       <p:ext uri="{BB962C8B-B14F-4D97-AF65-F5344CB8AC3E}">
         <p14:creationId xmlns:p14="http://schemas.microsoft.com/office/powerpoint/2010/main" val="464072628"/>
-      </p:ext>
-    </p:extLst>
-  </p:cSld>
-  <p:clrMapOvr>
-    <a:masterClrMapping/>
-  </p:clrMapOvr>
-</p:notes>
-</file>
-
-<file path=ppt/notesSlides/notesSlide23.xml><?xml version="1.0" encoding="utf-8"?>
-<p:notes xmlns:a="http://schemas.openxmlformats.org/drawingml/2006/main" xmlns:r="http://schemas.openxmlformats.org/officeDocument/2006/relationships" xmlns:p="http://schemas.openxmlformats.org/presentationml/2006/main">
-  <p:cSld>
-    <p:spTree>
-      <p:nvGrpSpPr>
-        <p:cNvPr id="1" name=""/>
-        <p:cNvGrpSpPr/>
-        <p:nvPr/>
-      </p:nvGrpSpPr>
-      <p:grpSpPr>
-        <a:xfrm>
-          <a:off x="0" y="0"/>
-          <a:ext cx="0" cy="0"/>
-          <a:chOff x="0" y="0"/>
-          <a:chExt cx="0" cy="0"/>
-        </a:xfrm>
-      </p:grpSpPr>
-      <p:sp>
-        <p:nvSpPr>
-          <p:cNvPr id="2" name="Образ слайда 1"/>
-          <p:cNvSpPr>
-            <a:spLocks noGrp="1" noRot="1" noChangeAspect="1"/>
-          </p:cNvSpPr>
-          <p:nvPr>
-            <p:ph type="sldImg"/>
-          </p:nvPr>
-        </p:nvSpPr>
-        <p:spPr/>
-      </p:sp>
-      <p:sp>
-        <p:nvSpPr>
-          <p:cNvPr id="3" name="Заметки 2"/>
-          <p:cNvSpPr>
-            <a:spLocks noGrp="1"/>
-          </p:cNvSpPr>
-          <p:nvPr>
-            <p:ph type="body" idx="1"/>
-          </p:nvPr>
-        </p:nvSpPr>
-        <p:spPr/>
-        <p:txBody>
-          <a:bodyPr/>
-          <a:lstStyle/>
-          <a:p>
-            <a:r>
-              <a:rPr lang="ru-RU" dirty="0"/>
-              <a:t>В алгоритме так же используются вероятностные полёты леви, благодаря которым алгоритм не застревает в локальных оптимумах и исследует всё новые и новые области. Это распределение отлично подходит для симуляции больших прыжков с не нулевыми вероятностями, благодаря его тяжелым хвостам.</a:t>
-            </a:r>
-            <a:endParaRPr lang="en-US" dirty="0"/>
-          </a:p>
-        </p:txBody>
-      </p:sp>
-      <p:sp>
-        <p:nvSpPr>
-          <p:cNvPr id="4" name="Номер слайда 3"/>
-          <p:cNvSpPr>
-            <a:spLocks noGrp="1"/>
-          </p:cNvSpPr>
-          <p:nvPr>
-            <p:ph type="sldNum" sz="quarter" idx="5"/>
-          </p:nvPr>
-        </p:nvSpPr>
-        <p:spPr/>
-        <p:txBody>
-          <a:bodyPr/>
-          <a:lstStyle/>
-          <a:p>
-            <a:fld id="{63122E3D-766E-4CE8-99C1-DB828FEDFC03}" type="slidenum">
-              <a:rPr lang="en-US" smtClean="0"/>
-              <a:t>23</a:t>
-            </a:fld>
-            <a:endParaRPr lang="en-US"/>
-          </a:p>
-        </p:txBody>
-      </p:sp>
-    </p:spTree>
-    <p:extLst>
-      <p:ext uri="{BB962C8B-B14F-4D97-AF65-F5344CB8AC3E}">
-        <p14:creationId xmlns:p14="http://schemas.microsoft.com/office/powerpoint/2010/main" val="2347338845"/>
       </p:ext>
     </p:extLst>
   </p:cSld>
@@ -2577,101 +2600,10 @@
           <a:lstStyle/>
           <a:p>
             <a:r>
-              <a:rPr lang="ru-RU" sz="1200" kern="1200" dirty="0">
-                <a:solidFill>
-                  <a:schemeClr val="tx1"/>
-                </a:solidFill>
-                <a:effectLst/>
-                <a:latin typeface="+mn-lt"/>
-                <a:ea typeface="+mn-ea"/>
-                <a:cs typeface="+mn-cs"/>
-              </a:rPr>
-              <a:t>Для поставленной задачи справедлива следующая теорема </a:t>
-            </a:r>
-            <a:r>
-              <a:rPr lang="en-US" sz="1200" kern="1200" dirty="0">
-                <a:solidFill>
-                  <a:schemeClr val="tx1"/>
-                </a:solidFill>
-                <a:effectLst/>
-                <a:latin typeface="+mn-lt"/>
-                <a:ea typeface="+mn-ea"/>
-                <a:cs typeface="+mn-cs"/>
-              </a:rPr>
-              <a:t>[</a:t>
-            </a:r>
-            <a:r>
-              <a:rPr lang="ru-RU" sz="1200" kern="1200" dirty="0">
-                <a:solidFill>
-                  <a:schemeClr val="tx1"/>
-                </a:solidFill>
-                <a:effectLst/>
-                <a:latin typeface="+mn-lt"/>
-                <a:ea typeface="+mn-ea"/>
-                <a:cs typeface="+mn-cs"/>
-              </a:rPr>
-              <a:t>со слайда</a:t>
-            </a:r>
-            <a:r>
-              <a:rPr lang="en-US" sz="1200" kern="1200" dirty="0">
-                <a:solidFill>
-                  <a:schemeClr val="tx1"/>
-                </a:solidFill>
-                <a:effectLst/>
-                <a:latin typeface="+mn-lt"/>
-                <a:ea typeface="+mn-ea"/>
-                <a:cs typeface="+mn-cs"/>
-              </a:rPr>
-              <a:t>]</a:t>
-            </a:r>
-            <a:r>
-              <a:rPr lang="ru-RU" sz="1200" kern="1200" dirty="0">
-                <a:solidFill>
-                  <a:schemeClr val="tx1"/>
-                </a:solidFill>
-                <a:effectLst/>
-                <a:latin typeface="+mn-lt"/>
-                <a:ea typeface="+mn-ea"/>
-                <a:cs typeface="+mn-cs"/>
-              </a:rPr>
-              <a:t> из этого следует что </a:t>
-            </a:r>
-            <a:r>
-              <a:rPr lang="en-US" sz="1200" kern="1200" dirty="0">
-                <a:solidFill>
-                  <a:schemeClr val="tx1"/>
-                </a:solidFill>
-                <a:effectLst/>
-                <a:latin typeface="+mn-lt"/>
-                <a:ea typeface="+mn-ea"/>
-                <a:cs typeface="+mn-cs"/>
-              </a:rPr>
-              <a:t>[</a:t>
-            </a:r>
-            <a:r>
-              <a:rPr lang="ru-RU" sz="1200" kern="1200" dirty="0">
-                <a:solidFill>
-                  <a:schemeClr val="tx1"/>
-                </a:solidFill>
-                <a:effectLst/>
-                <a:latin typeface="+mn-lt"/>
-                <a:ea typeface="+mn-ea"/>
-                <a:cs typeface="+mn-cs"/>
-              </a:rPr>
-              <a:t>со слайда</a:t>
-            </a:r>
-            <a:r>
-              <a:rPr lang="en-US" sz="1200" kern="1200" dirty="0">
-                <a:solidFill>
-                  <a:schemeClr val="tx1"/>
-                </a:solidFill>
-                <a:effectLst/>
-                <a:latin typeface="+mn-lt"/>
-                <a:ea typeface="+mn-ea"/>
-                <a:cs typeface="+mn-cs"/>
-              </a:rPr>
-              <a:t>]</a:t>
-            </a:r>
+              <a:rPr lang="ru-RU" dirty="0"/>
+              <a:t>В алгоритме так же используются вероятностные полёты леви, благодаря которым алгоритм не застревает в локальных оптимумах и исследует всё новые и новые области. Это распределение отлично подходит для симуляции больших прыжков с не нулевыми вероятностями, благодаря его тяжелым хвостам.</a:t>
+            </a:r>
+            <a:endParaRPr lang="en-US" dirty="0"/>
           </a:p>
         </p:txBody>
       </p:sp>
@@ -2701,7 +2633,7 @@
     </p:spTree>
     <p:extLst>
       <p:ext uri="{BB962C8B-B14F-4D97-AF65-F5344CB8AC3E}">
-        <p14:creationId xmlns:p14="http://schemas.microsoft.com/office/powerpoint/2010/main" val="2352340883"/>
+        <p14:creationId xmlns:p14="http://schemas.microsoft.com/office/powerpoint/2010/main" val="2347338845"/>
       </p:ext>
     </p:extLst>
   </p:cSld>
@@ -2756,10 +2688,101 @@
           <a:lstStyle/>
           <a:p>
             <a:r>
-              <a:rPr lang="ru-RU" dirty="0"/>
-              <a:t>Здесь представлен основной список литературы, которым мы пользовались в ходе работы. На этом у меня все спасибо за внимание.</a:t>
-            </a:r>
-            <a:endParaRPr lang="en-US" dirty="0"/>
+              <a:rPr lang="ru-RU" sz="1200" kern="1200" dirty="0">
+                <a:solidFill>
+                  <a:schemeClr val="tx1"/>
+                </a:solidFill>
+                <a:effectLst/>
+                <a:latin typeface="+mn-lt"/>
+                <a:ea typeface="+mn-ea"/>
+                <a:cs typeface="+mn-cs"/>
+              </a:rPr>
+              <a:t>Для поставленной задачи справедлива следующая теорема </a:t>
+            </a:r>
+            <a:r>
+              <a:rPr lang="en-US" sz="1200" kern="1200" dirty="0">
+                <a:solidFill>
+                  <a:schemeClr val="tx1"/>
+                </a:solidFill>
+                <a:effectLst/>
+                <a:latin typeface="+mn-lt"/>
+                <a:ea typeface="+mn-ea"/>
+                <a:cs typeface="+mn-cs"/>
+              </a:rPr>
+              <a:t>[</a:t>
+            </a:r>
+            <a:r>
+              <a:rPr lang="ru-RU" sz="1200" kern="1200" dirty="0">
+                <a:solidFill>
+                  <a:schemeClr val="tx1"/>
+                </a:solidFill>
+                <a:effectLst/>
+                <a:latin typeface="+mn-lt"/>
+                <a:ea typeface="+mn-ea"/>
+                <a:cs typeface="+mn-cs"/>
+              </a:rPr>
+              <a:t>со слайда</a:t>
+            </a:r>
+            <a:r>
+              <a:rPr lang="en-US" sz="1200" kern="1200" dirty="0">
+                <a:solidFill>
+                  <a:schemeClr val="tx1"/>
+                </a:solidFill>
+                <a:effectLst/>
+                <a:latin typeface="+mn-lt"/>
+                <a:ea typeface="+mn-ea"/>
+                <a:cs typeface="+mn-cs"/>
+              </a:rPr>
+              <a:t>]</a:t>
+            </a:r>
+            <a:r>
+              <a:rPr lang="ru-RU" sz="1200" kern="1200" dirty="0">
+                <a:solidFill>
+                  <a:schemeClr val="tx1"/>
+                </a:solidFill>
+                <a:effectLst/>
+                <a:latin typeface="+mn-lt"/>
+                <a:ea typeface="+mn-ea"/>
+                <a:cs typeface="+mn-cs"/>
+              </a:rPr>
+              <a:t> из этого следует что </a:t>
+            </a:r>
+            <a:r>
+              <a:rPr lang="en-US" sz="1200" kern="1200" dirty="0">
+                <a:solidFill>
+                  <a:schemeClr val="tx1"/>
+                </a:solidFill>
+                <a:effectLst/>
+                <a:latin typeface="+mn-lt"/>
+                <a:ea typeface="+mn-ea"/>
+                <a:cs typeface="+mn-cs"/>
+              </a:rPr>
+              <a:t>[</a:t>
+            </a:r>
+            <a:r>
+              <a:rPr lang="ru-RU" sz="1200" kern="1200" dirty="0">
+                <a:solidFill>
+                  <a:schemeClr val="tx1"/>
+                </a:solidFill>
+                <a:effectLst/>
+                <a:latin typeface="+mn-lt"/>
+                <a:ea typeface="+mn-ea"/>
+                <a:cs typeface="+mn-cs"/>
+              </a:rPr>
+              <a:t>со слайда</a:t>
+            </a:r>
+            <a:r>
+              <a:rPr lang="en-US" sz="1200" kern="1200" dirty="0">
+                <a:solidFill>
+                  <a:schemeClr val="tx1"/>
+                </a:solidFill>
+                <a:effectLst/>
+                <a:latin typeface="+mn-lt"/>
+                <a:ea typeface="+mn-ea"/>
+                <a:cs typeface="+mn-cs"/>
+              </a:rPr>
+              <a:t>]</a:t>
+            </a:r>
           </a:p>
         </p:txBody>
       </p:sp>
@@ -2781,6 +2804,500 @@
             <a:fld id="{63122E3D-766E-4CE8-99C1-DB828FEDFC03}" type="slidenum">
               <a:rPr lang="en-US" smtClean="0"/>
               <a:t>25</a:t>
+            </a:fld>
+            <a:endParaRPr lang="en-US"/>
+          </a:p>
+        </p:txBody>
+      </p:sp>
+    </p:spTree>
+    <p:extLst>
+      <p:ext uri="{BB962C8B-B14F-4D97-AF65-F5344CB8AC3E}">
+        <p14:creationId xmlns:p14="http://schemas.microsoft.com/office/powerpoint/2010/main" val="2352340883"/>
+      </p:ext>
+    </p:extLst>
+  </p:cSld>
+  <p:clrMapOvr>
+    <a:masterClrMapping/>
+  </p:clrMapOvr>
+</p:notes>
+</file>
+
+<file path=ppt/notesSlides/notesSlide26.xml><?xml version="1.0" encoding="utf-8"?>
+<p:notes xmlns:a="http://schemas.openxmlformats.org/drawingml/2006/main" xmlns:r="http://schemas.openxmlformats.org/officeDocument/2006/relationships" xmlns:p="http://schemas.openxmlformats.org/presentationml/2006/main">
+  <p:cSld>
+    <p:spTree>
+      <p:nvGrpSpPr>
+        <p:cNvPr id="1" name="">
+          <a:extLst>
+            <a:ext uri="{FF2B5EF4-FFF2-40B4-BE49-F238E27FC236}">
+              <a16:creationId xmlns:a16="http://schemas.microsoft.com/office/drawing/2014/main" id="{E24D9A4A-4B70-4A68-EA06-383743064692}"/>
+            </a:ext>
+          </a:extLst>
+        </p:cNvPr>
+        <p:cNvGrpSpPr/>
+        <p:nvPr/>
+      </p:nvGrpSpPr>
+      <p:grpSpPr>
+        <a:xfrm>
+          <a:off x="0" y="0"/>
+          <a:ext cx="0" cy="0"/>
+          <a:chOff x="0" y="0"/>
+          <a:chExt cx="0" cy="0"/>
+        </a:xfrm>
+      </p:grpSpPr>
+      <p:sp>
+        <p:nvSpPr>
+          <p:cNvPr id="2" name="Образ слайда 1">
+            <a:extLst>
+              <a:ext uri="{FF2B5EF4-FFF2-40B4-BE49-F238E27FC236}">
+                <a16:creationId xmlns:a16="http://schemas.microsoft.com/office/drawing/2014/main" id="{DE347364-14C8-8128-3B1D-E129F58176C0}"/>
+              </a:ext>
+            </a:extLst>
+          </p:cNvPr>
+          <p:cNvSpPr>
+            <a:spLocks noGrp="1" noRot="1" noChangeAspect="1"/>
+          </p:cNvSpPr>
+          <p:nvPr>
+            <p:ph type="sldImg"/>
+          </p:nvPr>
+        </p:nvSpPr>
+        <p:spPr/>
+      </p:sp>
+      <p:sp>
+        <p:nvSpPr>
+          <p:cNvPr id="3" name="Заметки 2">
+            <a:extLst>
+              <a:ext uri="{FF2B5EF4-FFF2-40B4-BE49-F238E27FC236}">
+                <a16:creationId xmlns:a16="http://schemas.microsoft.com/office/drawing/2014/main" id="{1DC62F6B-2966-E651-B7B9-405E79268598}"/>
+              </a:ext>
+            </a:extLst>
+          </p:cNvPr>
+          <p:cNvSpPr>
+            <a:spLocks noGrp="1"/>
+          </p:cNvSpPr>
+          <p:nvPr>
+            <p:ph type="body" idx="1"/>
+          </p:nvPr>
+        </p:nvSpPr>
+        <p:spPr/>
+        <p:txBody>
+          <a:bodyPr/>
+          <a:lstStyle/>
+          <a:p>
+            <a:r>
+              <a:rPr lang="ru-RU" sz="1200" kern="1200" dirty="0">
+                <a:solidFill>
+                  <a:schemeClr val="tx1"/>
+                </a:solidFill>
+                <a:effectLst/>
+                <a:latin typeface="+mn-lt"/>
+                <a:ea typeface="+mn-ea"/>
+                <a:cs typeface="+mn-cs"/>
+              </a:rPr>
+              <a:t>Для поставленной задачи справедлива следующая теорема </a:t>
+            </a:r>
+            <a:r>
+              <a:rPr lang="en-US" sz="1200" kern="1200" dirty="0">
+                <a:solidFill>
+                  <a:schemeClr val="tx1"/>
+                </a:solidFill>
+                <a:effectLst/>
+                <a:latin typeface="+mn-lt"/>
+                <a:ea typeface="+mn-ea"/>
+                <a:cs typeface="+mn-cs"/>
+              </a:rPr>
+              <a:t>[</a:t>
+            </a:r>
+            <a:r>
+              <a:rPr lang="ru-RU" sz="1200" kern="1200" dirty="0">
+                <a:solidFill>
+                  <a:schemeClr val="tx1"/>
+                </a:solidFill>
+                <a:effectLst/>
+                <a:latin typeface="+mn-lt"/>
+                <a:ea typeface="+mn-ea"/>
+                <a:cs typeface="+mn-cs"/>
+              </a:rPr>
+              <a:t>со слайда</a:t>
+            </a:r>
+            <a:r>
+              <a:rPr lang="en-US" sz="1200" kern="1200" dirty="0">
+                <a:solidFill>
+                  <a:schemeClr val="tx1"/>
+                </a:solidFill>
+                <a:effectLst/>
+                <a:latin typeface="+mn-lt"/>
+                <a:ea typeface="+mn-ea"/>
+                <a:cs typeface="+mn-cs"/>
+              </a:rPr>
+              <a:t>]</a:t>
+            </a:r>
+            <a:r>
+              <a:rPr lang="ru-RU" sz="1200" kern="1200" dirty="0">
+                <a:solidFill>
+                  <a:schemeClr val="tx1"/>
+                </a:solidFill>
+                <a:effectLst/>
+                <a:latin typeface="+mn-lt"/>
+                <a:ea typeface="+mn-ea"/>
+                <a:cs typeface="+mn-cs"/>
+              </a:rPr>
+              <a:t> из этого следует что </a:t>
+            </a:r>
+            <a:r>
+              <a:rPr lang="en-US" sz="1200" kern="1200" dirty="0">
+                <a:solidFill>
+                  <a:schemeClr val="tx1"/>
+                </a:solidFill>
+                <a:effectLst/>
+                <a:latin typeface="+mn-lt"/>
+                <a:ea typeface="+mn-ea"/>
+                <a:cs typeface="+mn-cs"/>
+              </a:rPr>
+              <a:t>[</a:t>
+            </a:r>
+            <a:r>
+              <a:rPr lang="ru-RU" sz="1200" kern="1200" dirty="0">
+                <a:solidFill>
+                  <a:schemeClr val="tx1"/>
+                </a:solidFill>
+                <a:effectLst/>
+                <a:latin typeface="+mn-lt"/>
+                <a:ea typeface="+mn-ea"/>
+                <a:cs typeface="+mn-cs"/>
+              </a:rPr>
+              <a:t>со слайда</a:t>
+            </a:r>
+            <a:r>
+              <a:rPr lang="en-US" sz="1200" kern="1200" dirty="0">
+                <a:solidFill>
+                  <a:schemeClr val="tx1"/>
+                </a:solidFill>
+                <a:effectLst/>
+                <a:latin typeface="+mn-lt"/>
+                <a:ea typeface="+mn-ea"/>
+                <a:cs typeface="+mn-cs"/>
+              </a:rPr>
+              <a:t>]</a:t>
+            </a:r>
+          </a:p>
+        </p:txBody>
+      </p:sp>
+      <p:sp>
+        <p:nvSpPr>
+          <p:cNvPr id="4" name="Номер слайда 3">
+            <a:extLst>
+              <a:ext uri="{FF2B5EF4-FFF2-40B4-BE49-F238E27FC236}">
+                <a16:creationId xmlns:a16="http://schemas.microsoft.com/office/drawing/2014/main" id="{1515C3F7-2F3E-8BA0-7ABD-103D9908150A}"/>
+              </a:ext>
+            </a:extLst>
+          </p:cNvPr>
+          <p:cNvSpPr>
+            <a:spLocks noGrp="1"/>
+          </p:cNvSpPr>
+          <p:nvPr>
+            <p:ph type="sldNum" sz="quarter" idx="5"/>
+          </p:nvPr>
+        </p:nvSpPr>
+        <p:spPr/>
+        <p:txBody>
+          <a:bodyPr/>
+          <a:lstStyle/>
+          <a:p>
+            <a:fld id="{63122E3D-766E-4CE8-99C1-DB828FEDFC03}" type="slidenum">
+              <a:rPr lang="en-US" smtClean="0"/>
+              <a:t>26</a:t>
+            </a:fld>
+            <a:endParaRPr lang="en-US"/>
+          </a:p>
+        </p:txBody>
+      </p:sp>
+    </p:spTree>
+    <p:extLst>
+      <p:ext uri="{BB962C8B-B14F-4D97-AF65-F5344CB8AC3E}">
+        <p14:creationId xmlns:p14="http://schemas.microsoft.com/office/powerpoint/2010/main" val="2820083098"/>
+      </p:ext>
+    </p:extLst>
+  </p:cSld>
+  <p:clrMapOvr>
+    <a:masterClrMapping/>
+  </p:clrMapOvr>
+</p:notes>
+</file>
+
+<file path=ppt/notesSlides/notesSlide27.xml><?xml version="1.0" encoding="utf-8"?>
+<p:notes xmlns:a="http://schemas.openxmlformats.org/drawingml/2006/main" xmlns:r="http://schemas.openxmlformats.org/officeDocument/2006/relationships" xmlns:p="http://schemas.openxmlformats.org/presentationml/2006/main">
+  <p:cSld>
+    <p:spTree>
+      <p:nvGrpSpPr>
+        <p:cNvPr id="1" name="">
+          <a:extLst>
+            <a:ext uri="{FF2B5EF4-FFF2-40B4-BE49-F238E27FC236}">
+              <a16:creationId xmlns:a16="http://schemas.microsoft.com/office/drawing/2014/main" id="{021E2C00-EA76-85A2-BF79-7CAFB5FF3963}"/>
+            </a:ext>
+          </a:extLst>
+        </p:cNvPr>
+        <p:cNvGrpSpPr/>
+        <p:nvPr/>
+      </p:nvGrpSpPr>
+      <p:grpSpPr>
+        <a:xfrm>
+          <a:off x="0" y="0"/>
+          <a:ext cx="0" cy="0"/>
+          <a:chOff x="0" y="0"/>
+          <a:chExt cx="0" cy="0"/>
+        </a:xfrm>
+      </p:grpSpPr>
+      <p:sp>
+        <p:nvSpPr>
+          <p:cNvPr id="2" name="Образ слайда 1">
+            <a:extLst>
+              <a:ext uri="{FF2B5EF4-FFF2-40B4-BE49-F238E27FC236}">
+                <a16:creationId xmlns:a16="http://schemas.microsoft.com/office/drawing/2014/main" id="{99B47AD6-FFF2-7875-BB5C-A4801F2B2F04}"/>
+              </a:ext>
+            </a:extLst>
+          </p:cNvPr>
+          <p:cNvSpPr>
+            <a:spLocks noGrp="1" noRot="1" noChangeAspect="1"/>
+          </p:cNvSpPr>
+          <p:nvPr>
+            <p:ph type="sldImg"/>
+          </p:nvPr>
+        </p:nvSpPr>
+        <p:spPr/>
+      </p:sp>
+      <p:sp>
+        <p:nvSpPr>
+          <p:cNvPr id="3" name="Заметки 2">
+            <a:extLst>
+              <a:ext uri="{FF2B5EF4-FFF2-40B4-BE49-F238E27FC236}">
+                <a16:creationId xmlns:a16="http://schemas.microsoft.com/office/drawing/2014/main" id="{495C99F8-3139-7358-3E9D-21E89988DA26}"/>
+              </a:ext>
+            </a:extLst>
+          </p:cNvPr>
+          <p:cNvSpPr>
+            <a:spLocks noGrp="1"/>
+          </p:cNvSpPr>
+          <p:nvPr>
+            <p:ph type="body" idx="1"/>
+          </p:nvPr>
+        </p:nvSpPr>
+        <p:spPr/>
+        <p:txBody>
+          <a:bodyPr/>
+          <a:lstStyle/>
+          <a:p>
+            <a:r>
+              <a:rPr lang="ru-RU" sz="1200" kern="1200" dirty="0">
+                <a:solidFill>
+                  <a:schemeClr val="tx1"/>
+                </a:solidFill>
+                <a:effectLst/>
+                <a:latin typeface="+mn-lt"/>
+                <a:ea typeface="+mn-ea"/>
+                <a:cs typeface="+mn-cs"/>
+              </a:rPr>
+              <a:t>Для поставленной задачи справедлива следующая теорема </a:t>
+            </a:r>
+            <a:r>
+              <a:rPr lang="en-US" sz="1200" kern="1200" dirty="0">
+                <a:solidFill>
+                  <a:schemeClr val="tx1"/>
+                </a:solidFill>
+                <a:effectLst/>
+                <a:latin typeface="+mn-lt"/>
+                <a:ea typeface="+mn-ea"/>
+                <a:cs typeface="+mn-cs"/>
+              </a:rPr>
+              <a:t>[</a:t>
+            </a:r>
+            <a:r>
+              <a:rPr lang="ru-RU" sz="1200" kern="1200" dirty="0">
+                <a:solidFill>
+                  <a:schemeClr val="tx1"/>
+                </a:solidFill>
+                <a:effectLst/>
+                <a:latin typeface="+mn-lt"/>
+                <a:ea typeface="+mn-ea"/>
+                <a:cs typeface="+mn-cs"/>
+              </a:rPr>
+              <a:t>со слайда</a:t>
+            </a:r>
+            <a:r>
+              <a:rPr lang="en-US" sz="1200" kern="1200" dirty="0">
+                <a:solidFill>
+                  <a:schemeClr val="tx1"/>
+                </a:solidFill>
+                <a:effectLst/>
+                <a:latin typeface="+mn-lt"/>
+                <a:ea typeface="+mn-ea"/>
+                <a:cs typeface="+mn-cs"/>
+              </a:rPr>
+              <a:t>]</a:t>
+            </a:r>
+            <a:r>
+              <a:rPr lang="ru-RU" sz="1200" kern="1200" dirty="0">
+                <a:solidFill>
+                  <a:schemeClr val="tx1"/>
+                </a:solidFill>
+                <a:effectLst/>
+                <a:latin typeface="+mn-lt"/>
+                <a:ea typeface="+mn-ea"/>
+                <a:cs typeface="+mn-cs"/>
+              </a:rPr>
+              <a:t> из этого следует что </a:t>
+            </a:r>
+            <a:r>
+              <a:rPr lang="en-US" sz="1200" kern="1200" dirty="0">
+                <a:solidFill>
+                  <a:schemeClr val="tx1"/>
+                </a:solidFill>
+                <a:effectLst/>
+                <a:latin typeface="+mn-lt"/>
+                <a:ea typeface="+mn-ea"/>
+                <a:cs typeface="+mn-cs"/>
+              </a:rPr>
+              <a:t>[</a:t>
+            </a:r>
+            <a:r>
+              <a:rPr lang="ru-RU" sz="1200" kern="1200" dirty="0">
+                <a:solidFill>
+                  <a:schemeClr val="tx1"/>
+                </a:solidFill>
+                <a:effectLst/>
+                <a:latin typeface="+mn-lt"/>
+                <a:ea typeface="+mn-ea"/>
+                <a:cs typeface="+mn-cs"/>
+              </a:rPr>
+              <a:t>со слайда</a:t>
+            </a:r>
+            <a:r>
+              <a:rPr lang="en-US" sz="1200" kern="1200" dirty="0">
+                <a:solidFill>
+                  <a:schemeClr val="tx1"/>
+                </a:solidFill>
+                <a:effectLst/>
+                <a:latin typeface="+mn-lt"/>
+                <a:ea typeface="+mn-ea"/>
+                <a:cs typeface="+mn-cs"/>
+              </a:rPr>
+              <a:t>]</a:t>
+            </a:r>
+          </a:p>
+        </p:txBody>
+      </p:sp>
+      <p:sp>
+        <p:nvSpPr>
+          <p:cNvPr id="4" name="Номер слайда 3">
+            <a:extLst>
+              <a:ext uri="{FF2B5EF4-FFF2-40B4-BE49-F238E27FC236}">
+                <a16:creationId xmlns:a16="http://schemas.microsoft.com/office/drawing/2014/main" id="{6981C752-2567-7FC6-BC8A-E166D5999E95}"/>
+              </a:ext>
+            </a:extLst>
+          </p:cNvPr>
+          <p:cNvSpPr>
+            <a:spLocks noGrp="1"/>
+          </p:cNvSpPr>
+          <p:nvPr>
+            <p:ph type="sldNum" sz="quarter" idx="5"/>
+          </p:nvPr>
+        </p:nvSpPr>
+        <p:spPr/>
+        <p:txBody>
+          <a:bodyPr/>
+          <a:lstStyle/>
+          <a:p>
+            <a:fld id="{63122E3D-766E-4CE8-99C1-DB828FEDFC03}" type="slidenum">
+              <a:rPr lang="en-US" smtClean="0"/>
+              <a:t>27</a:t>
+            </a:fld>
+            <a:endParaRPr lang="en-US"/>
+          </a:p>
+        </p:txBody>
+      </p:sp>
+    </p:spTree>
+    <p:extLst>
+      <p:ext uri="{BB962C8B-B14F-4D97-AF65-F5344CB8AC3E}">
+        <p14:creationId xmlns:p14="http://schemas.microsoft.com/office/powerpoint/2010/main" val="842376768"/>
+      </p:ext>
+    </p:extLst>
+  </p:cSld>
+  <p:clrMapOvr>
+    <a:masterClrMapping/>
+  </p:clrMapOvr>
+</p:notes>
+</file>
+
+<file path=ppt/notesSlides/notesSlide28.xml><?xml version="1.0" encoding="utf-8"?>
+<p:notes xmlns:a="http://schemas.openxmlformats.org/drawingml/2006/main" xmlns:r="http://schemas.openxmlformats.org/officeDocument/2006/relationships" xmlns:p="http://schemas.openxmlformats.org/presentationml/2006/main">
+  <p:cSld>
+    <p:spTree>
+      <p:nvGrpSpPr>
+        <p:cNvPr id="1" name=""/>
+        <p:cNvGrpSpPr/>
+        <p:nvPr/>
+      </p:nvGrpSpPr>
+      <p:grpSpPr>
+        <a:xfrm>
+          <a:off x="0" y="0"/>
+          <a:ext cx="0" cy="0"/>
+          <a:chOff x="0" y="0"/>
+          <a:chExt cx="0" cy="0"/>
+        </a:xfrm>
+      </p:grpSpPr>
+      <p:sp>
+        <p:nvSpPr>
+          <p:cNvPr id="2" name="Образ слайда 1"/>
+          <p:cNvSpPr>
+            <a:spLocks noGrp="1" noRot="1" noChangeAspect="1"/>
+          </p:cNvSpPr>
+          <p:nvPr>
+            <p:ph type="sldImg"/>
+          </p:nvPr>
+        </p:nvSpPr>
+        <p:spPr/>
+      </p:sp>
+      <p:sp>
+        <p:nvSpPr>
+          <p:cNvPr id="3" name="Заметки 2"/>
+          <p:cNvSpPr>
+            <a:spLocks noGrp="1"/>
+          </p:cNvSpPr>
+          <p:nvPr>
+            <p:ph type="body" idx="1"/>
+          </p:nvPr>
+        </p:nvSpPr>
+        <p:spPr/>
+        <p:txBody>
+          <a:bodyPr/>
+          <a:lstStyle/>
+          <a:p>
+            <a:r>
+              <a:rPr lang="ru-RU" dirty="0"/>
+              <a:t>Здесь представлен основной список литературы, которым мы пользовались в ходе работы. На этом у меня все спасибо за внимание.</a:t>
+            </a:r>
+            <a:endParaRPr lang="en-US" dirty="0"/>
+          </a:p>
+        </p:txBody>
+      </p:sp>
+      <p:sp>
+        <p:nvSpPr>
+          <p:cNvPr id="4" name="Номер слайда 3"/>
+          <p:cNvSpPr>
+            <a:spLocks noGrp="1"/>
+          </p:cNvSpPr>
+          <p:nvPr>
+            <p:ph type="sldNum" sz="quarter" idx="5"/>
+          </p:nvPr>
+        </p:nvSpPr>
+        <p:spPr/>
+        <p:txBody>
+          <a:bodyPr/>
+          <a:lstStyle/>
+          <a:p>
+            <a:fld id="{63122E3D-766E-4CE8-99C1-DB828FEDFC03}" type="slidenum">
+              <a:rPr lang="en-US" smtClean="0"/>
+              <a:t>28</a:t>
             </a:fld>
             <a:endParaRPr lang="en-US"/>
           </a:p>
@@ -2799,7 +3316,7 @@
 </p:notes>
 </file>
 
-<file path=ppt/notesSlides/notesSlide26.xml><?xml version="1.0" encoding="utf-8"?>
+<file path=ppt/notesSlides/notesSlide29.xml><?xml version="1.0" encoding="utf-8"?>
 <p:notes xmlns:a="http://schemas.openxmlformats.org/drawingml/2006/main" xmlns:r="http://schemas.openxmlformats.org/officeDocument/2006/relationships" xmlns:p="http://schemas.openxmlformats.org/presentationml/2006/main">
   <p:cSld>
     <p:spTree>
@@ -2888,7 +3405,7 @@
           <a:p>
             <a:fld id="{63122E3D-766E-4CE8-99C1-DB828FEDFC03}" type="slidenum">
               <a:rPr lang="en-US" smtClean="0"/>
-              <a:t>26</a:t>
+              <a:t>29</a:t>
             </a:fld>
             <a:endParaRPr lang="en-US"/>
           </a:p>
@@ -4081,7 +4598,7 @@
           <a:p>
             <a:fld id="{F88B4CF7-4AF6-4F22-BEAD-2FF1E49FC008}" type="datetimeFigureOut">
               <a:rPr lang="ru-RU" smtClean="0"/>
-              <a:t>24.04.2026</a:t>
+              <a:t>11.06.2026</a:t>
             </a:fld>
             <a:endParaRPr lang="ru-RU"/>
           </a:p>
@@ -4295,7 +4812,7 @@
           <a:p>
             <a:fld id="{F88B4CF7-4AF6-4F22-BEAD-2FF1E49FC008}" type="datetimeFigureOut">
               <a:rPr lang="ru-RU" smtClean="0"/>
-              <a:t>24.04.2026</a:t>
+              <a:t>11.06.2026</a:t>
             </a:fld>
             <a:endParaRPr lang="ru-RU"/>
           </a:p>
@@ -4503,7 +5020,7 @@
           <a:p>
             <a:fld id="{F88B4CF7-4AF6-4F22-BEAD-2FF1E49FC008}" type="datetimeFigureOut">
               <a:rPr lang="ru-RU" smtClean="0"/>
-              <a:t>24.04.2026</a:t>
+              <a:t>11.06.2026</a:t>
             </a:fld>
             <a:endParaRPr lang="ru-RU"/>
           </a:p>
@@ -4701,7 +5218,7 @@
           <a:p>
             <a:fld id="{F88B4CF7-4AF6-4F22-BEAD-2FF1E49FC008}" type="datetimeFigureOut">
               <a:rPr lang="ru-RU" smtClean="0"/>
-              <a:t>24.04.2026</a:t>
+              <a:t>11.06.2026</a:t>
             </a:fld>
             <a:endParaRPr lang="ru-RU"/>
           </a:p>
@@ -4976,7 +5493,7 @@
           <a:p>
             <a:fld id="{F88B4CF7-4AF6-4F22-BEAD-2FF1E49FC008}" type="datetimeFigureOut">
               <a:rPr lang="ru-RU" smtClean="0"/>
-              <a:t>24.04.2026</a:t>
+              <a:t>11.06.2026</a:t>
             </a:fld>
             <a:endParaRPr lang="ru-RU"/>
           </a:p>
@@ -5241,7 +5758,7 @@
           <a:p>
             <a:fld id="{F88B4CF7-4AF6-4F22-BEAD-2FF1E49FC008}" type="datetimeFigureOut">
               <a:rPr lang="ru-RU" smtClean="0"/>
-              <a:t>24.04.2026</a:t>
+              <a:t>11.06.2026</a:t>
             </a:fld>
             <a:endParaRPr lang="ru-RU"/>
           </a:p>
@@ -5653,7 +6170,7 @@
           <a:p>
             <a:fld id="{F88B4CF7-4AF6-4F22-BEAD-2FF1E49FC008}" type="datetimeFigureOut">
               <a:rPr lang="ru-RU" smtClean="0"/>
-              <a:t>24.04.2026</a:t>
+              <a:t>11.06.2026</a:t>
             </a:fld>
             <a:endParaRPr lang="ru-RU"/>
           </a:p>
@@ -5794,7 +6311,7 @@
           <a:p>
             <a:fld id="{F88B4CF7-4AF6-4F22-BEAD-2FF1E49FC008}" type="datetimeFigureOut">
               <a:rPr lang="ru-RU" smtClean="0"/>
-              <a:t>24.04.2026</a:t>
+              <a:t>11.06.2026</a:t>
             </a:fld>
             <a:endParaRPr lang="ru-RU"/>
           </a:p>
@@ -5907,7 +6424,7 @@
           <a:p>
             <a:fld id="{F88B4CF7-4AF6-4F22-BEAD-2FF1E49FC008}" type="datetimeFigureOut">
               <a:rPr lang="ru-RU" smtClean="0"/>
-              <a:t>24.04.2026</a:t>
+              <a:t>11.06.2026</a:t>
             </a:fld>
             <a:endParaRPr lang="ru-RU"/>
           </a:p>
@@ -6218,7 +6735,7 @@
           <a:p>
             <a:fld id="{F88B4CF7-4AF6-4F22-BEAD-2FF1E49FC008}" type="datetimeFigureOut">
               <a:rPr lang="ru-RU" smtClean="0"/>
-              <a:t>24.04.2026</a:t>
+              <a:t>11.06.2026</a:t>
             </a:fld>
             <a:endParaRPr lang="ru-RU"/>
           </a:p>
@@ -6506,7 +7023,7 @@
           <a:p>
             <a:fld id="{F88B4CF7-4AF6-4F22-BEAD-2FF1E49FC008}" type="datetimeFigureOut">
               <a:rPr lang="ru-RU" smtClean="0"/>
-              <a:t>24.04.2026</a:t>
+              <a:t>11.06.2026</a:t>
             </a:fld>
             <a:endParaRPr lang="ru-RU"/>
           </a:p>
@@ -6747,7 +7264,7 @@
           <a:p>
             <a:fld id="{F88B4CF7-4AF6-4F22-BEAD-2FF1E49FC008}" type="datetimeFigureOut">
               <a:rPr lang="ru-RU" smtClean="0"/>
-              <a:t>24.04.2026</a:t>
+              <a:t>11.06.2026</a:t>
             </a:fld>
             <a:endParaRPr lang="ru-RU"/>
           </a:p>
@@ -7929,7 +8446,7 @@
 </file>
 
 <file path=ppt/slides/slide13.xml><?xml version="1.0" encoding="utf-8"?>
-<p:sld xmlns:a="http://schemas.openxmlformats.org/drawingml/2006/main" xmlns:r="http://schemas.openxmlformats.org/officeDocument/2006/relationships" xmlns:p="http://schemas.openxmlformats.org/presentationml/2006/main">
+<p:sld xmlns:a="http://schemas.openxmlformats.org/drawingml/2006/main" xmlns:r="http://schemas.openxmlformats.org/officeDocument/2006/relationships" xmlns:p="http://schemas.openxmlformats.org/presentationml/2006/main" show="0">
   <p:cSld>
     <p:spTree>
       <p:nvGrpSpPr>
@@ -8439,8 +8956,8 @@
           </a:p>
         </p:txBody>
       </p:sp>
-      <mc:AlternateContent xmlns:mc="http://schemas.openxmlformats.org/markup-compatibility/2006">
-        <mc:Choice xmlns:a14="http://schemas.microsoft.com/office/drawing/2010/main" Requires="a14">
+      <mc:AlternateContent xmlns:mc="http://schemas.openxmlformats.org/markup-compatibility/2006" xmlns:a14="http://schemas.microsoft.com/office/drawing/2010/main">
+        <mc:Choice Requires="a14">
           <p:graphicFrame>
             <p:nvGraphicFramePr>
               <p:cNvPr id="3" name="Объект 3">
@@ -9499,7 +10016,7 @@
             </a:graphic>
           </p:graphicFrame>
         </mc:Choice>
-        <mc:Fallback>
+        <mc:Fallback xmlns="">
           <p:graphicFrame>
             <p:nvGraphicFramePr>
               <p:cNvPr id="3" name="Объект 3">
@@ -11015,6 +11532,532 @@
         <p:cNvPr id="1" name="">
           <a:extLst>
             <a:ext uri="{FF2B5EF4-FFF2-40B4-BE49-F238E27FC236}">
+              <a16:creationId xmlns:a16="http://schemas.microsoft.com/office/drawing/2014/main" id="{61F78041-1A44-A417-4338-5D1CC3BF50E9}"/>
+            </a:ext>
+          </a:extLst>
+        </p:cNvPr>
+        <p:cNvGrpSpPr/>
+        <p:nvPr/>
+      </p:nvGrpSpPr>
+      <p:grpSpPr>
+        <a:xfrm>
+          <a:off x="0" y="0"/>
+          <a:ext cx="0" cy="0"/>
+          <a:chOff x="0" y="0"/>
+          <a:chExt cx="0" cy="0"/>
+        </a:xfrm>
+      </p:grpSpPr>
+      <p:sp>
+        <p:nvSpPr>
+          <p:cNvPr id="2" name="Заголовок 1">
+            <a:extLst>
+              <a:ext uri="{FF2B5EF4-FFF2-40B4-BE49-F238E27FC236}">
+                <a16:creationId xmlns:a16="http://schemas.microsoft.com/office/drawing/2014/main" id="{4DE49BD9-6AC3-1880-72D4-D6EC9A1AE053}"/>
+              </a:ext>
+            </a:extLst>
+          </p:cNvPr>
+          <p:cNvSpPr>
+            <a:spLocks noGrp="1"/>
+          </p:cNvSpPr>
+          <p:nvPr>
+            <p:ph type="title"/>
+          </p:nvPr>
+        </p:nvSpPr>
+        <p:spPr>
+          <a:xfrm>
+            <a:off x="1055688" y="728663"/>
+            <a:ext cx="10080625" cy="1008062"/>
+          </a:xfrm>
+        </p:spPr>
+        <p:txBody>
+          <a:bodyPr/>
+          <a:lstStyle/>
+          <a:p>
+            <a:r>
+              <a:rPr lang="ru-RU" sz="3600" b="1" dirty="0">
+                <a:solidFill>
+                  <a:srgbClr val="246AF3"/>
+                </a:solidFill>
+              </a:rPr>
+              <a:t>Энергия системы</a:t>
+            </a:r>
+          </a:p>
+        </p:txBody>
+      </p:sp>
+      <p:sp>
+        <p:nvSpPr>
+          <p:cNvPr id="3" name="TextBox 2">
+            <a:extLst>
+              <a:ext uri="{FF2B5EF4-FFF2-40B4-BE49-F238E27FC236}">
+                <a16:creationId xmlns:a16="http://schemas.microsoft.com/office/drawing/2014/main" id="{FE1A9353-9765-A4BF-0E64-30A31BDFF21A}"/>
+              </a:ext>
+            </a:extLst>
+          </p:cNvPr>
+          <p:cNvSpPr txBox="1"/>
+          <p:nvPr/>
+        </p:nvSpPr>
+        <p:spPr>
+          <a:xfrm>
+            <a:off x="11510319" y="6277232"/>
+            <a:ext cx="438665" cy="377706"/>
+          </a:xfrm>
+          <a:prstGeom prst="rect">
+            <a:avLst/>
+          </a:prstGeom>
+          <a:noFill/>
+        </p:spPr>
+        <p:txBody>
+          <a:bodyPr wrap="square" rtlCol="0">
+            <a:spAutoFit/>
+          </a:bodyPr>
+          <a:lstStyle/>
+          <a:p>
+            <a:fld id="{9C552BD2-5A63-4FC4-A35C-09FBB5EA732A}" type="slidenum">
+              <a:rPr lang="en-US" smtClean="0"/>
+              <a:t>19</a:t>
+            </a:fld>
+            <a:endParaRPr lang="en-US" dirty="0"/>
+          </a:p>
+        </p:txBody>
+      </p:sp>
+      <p:pic>
+        <p:nvPicPr>
+          <p:cNvPr id="7" name="Рисунок 6">
+            <a:extLst>
+              <a:ext uri="{FF2B5EF4-FFF2-40B4-BE49-F238E27FC236}">
+                <a16:creationId xmlns:a16="http://schemas.microsoft.com/office/drawing/2014/main" id="{7E62E1EB-6BA4-EBEB-A5D5-544EED8E56F5}"/>
+              </a:ext>
+            </a:extLst>
+          </p:cNvPr>
+          <p:cNvPicPr>
+            <a:picLocks noChangeAspect="1"/>
+          </p:cNvPicPr>
+          <p:nvPr/>
+        </p:nvPicPr>
+        <p:blipFill>
+          <a:blip r:embed="rId3"/>
+          <a:stretch>
+            <a:fillRect/>
+          </a:stretch>
+        </p:blipFill>
+        <p:spPr>
+          <a:xfrm>
+            <a:off x="2596882" y="3039618"/>
+            <a:ext cx="7403125" cy="1719344"/>
+          </a:xfrm>
+          <a:prstGeom prst="rect">
+            <a:avLst/>
+          </a:prstGeom>
+        </p:spPr>
+      </p:pic>
+      <p:sp>
+        <p:nvSpPr>
+          <p:cNvPr id="9" name="Прямоугольник: скругленные углы 8">
+            <a:extLst>
+              <a:ext uri="{FF2B5EF4-FFF2-40B4-BE49-F238E27FC236}">
+                <a16:creationId xmlns:a16="http://schemas.microsoft.com/office/drawing/2014/main" id="{61C62FF3-FE06-98B8-5801-2B975CDAE9AA}"/>
+              </a:ext>
+            </a:extLst>
+          </p:cNvPr>
+          <p:cNvSpPr/>
+          <p:nvPr/>
+        </p:nvSpPr>
+        <p:spPr>
+          <a:xfrm>
+            <a:off x="5926229" y="3039618"/>
+            <a:ext cx="3725332" cy="685715"/>
+          </a:xfrm>
+          <a:prstGeom prst="roundRect">
+            <a:avLst/>
+          </a:prstGeom>
+          <a:noFill/>
+          <a:ln>
+            <a:solidFill>
+              <a:srgbClr val="C00000"/>
+            </a:solidFill>
+          </a:ln>
+        </p:spPr>
+        <p:style>
+          <a:lnRef idx="2">
+            <a:schemeClr val="accent1">
+              <a:shade val="15000"/>
+            </a:schemeClr>
+          </a:lnRef>
+          <a:fillRef idx="1">
+            <a:schemeClr val="accent1"/>
+          </a:fillRef>
+          <a:effectRef idx="0">
+            <a:schemeClr val="accent1"/>
+          </a:effectRef>
+          <a:fontRef idx="minor">
+            <a:schemeClr val="lt1"/>
+          </a:fontRef>
+        </p:style>
+        <p:txBody>
+          <a:bodyPr rtlCol="0" anchor="ctr"/>
+          <a:lstStyle/>
+          <a:p>
+            <a:pPr algn="ctr"/>
+            <a:endParaRPr lang="en-US"/>
+          </a:p>
+        </p:txBody>
+      </p:sp>
+      <p:sp>
+        <p:nvSpPr>
+          <p:cNvPr id="12" name="TextBox 11">
+            <a:extLst>
+              <a:ext uri="{FF2B5EF4-FFF2-40B4-BE49-F238E27FC236}">
+                <a16:creationId xmlns:a16="http://schemas.microsoft.com/office/drawing/2014/main" id="{96345326-44E4-A636-50E4-4261F5D2E559}"/>
+              </a:ext>
+            </a:extLst>
+          </p:cNvPr>
+          <p:cNvSpPr txBox="1"/>
+          <p:nvPr/>
+        </p:nvSpPr>
+        <p:spPr>
+          <a:xfrm>
+            <a:off x="807287" y="1976734"/>
+            <a:ext cx="4742004" cy="461665"/>
+          </a:xfrm>
+          <a:prstGeom prst="rect">
+            <a:avLst/>
+          </a:prstGeom>
+          <a:noFill/>
+        </p:spPr>
+        <p:txBody>
+          <a:bodyPr wrap="none" rtlCol="0">
+            <a:spAutoFit/>
+          </a:bodyPr>
+          <a:lstStyle/>
+          <a:p>
+            <a:r>
+              <a:rPr lang="ru-RU" sz="2400" dirty="0"/>
+              <a:t>Коэффициент масштабирования</a:t>
+            </a:r>
+            <a:endParaRPr lang="en-US" sz="2400" dirty="0"/>
+          </a:p>
+        </p:txBody>
+      </p:sp>
+      <p:cxnSp>
+        <p:nvCxnSpPr>
+          <p:cNvPr id="18" name="Прямая со стрелкой 17">
+            <a:extLst>
+              <a:ext uri="{FF2B5EF4-FFF2-40B4-BE49-F238E27FC236}">
+                <a16:creationId xmlns:a16="http://schemas.microsoft.com/office/drawing/2014/main" id="{771F77D1-B79C-9FB3-69AD-43F9994199E7}"/>
+              </a:ext>
+            </a:extLst>
+          </p:cNvPr>
+          <p:cNvCxnSpPr>
+            <a:cxnSpLocks/>
+          </p:cNvCxnSpPr>
+          <p:nvPr/>
+        </p:nvCxnSpPr>
+        <p:spPr>
+          <a:xfrm>
+            <a:off x="5193823" y="2438399"/>
+            <a:ext cx="350661" cy="756357"/>
+          </a:xfrm>
+          <a:prstGeom prst="straightConnector1">
+            <a:avLst/>
+          </a:prstGeom>
+          <a:ln>
+            <a:solidFill>
+              <a:srgbClr val="C00000"/>
+            </a:solidFill>
+            <a:tailEnd type="triangle"/>
+          </a:ln>
+        </p:spPr>
+        <p:style>
+          <a:lnRef idx="2">
+            <a:schemeClr val="accent1"/>
+          </a:lnRef>
+          <a:fillRef idx="0">
+            <a:schemeClr val="accent1"/>
+          </a:fillRef>
+          <a:effectRef idx="1">
+            <a:schemeClr val="accent1"/>
+          </a:effectRef>
+          <a:fontRef idx="minor">
+            <a:schemeClr val="tx1"/>
+          </a:fontRef>
+        </p:style>
+      </p:cxnSp>
+      <p:cxnSp>
+        <p:nvCxnSpPr>
+          <p:cNvPr id="21" name="Прямая соединительная линия 20">
+            <a:extLst>
+              <a:ext uri="{FF2B5EF4-FFF2-40B4-BE49-F238E27FC236}">
+                <a16:creationId xmlns:a16="http://schemas.microsoft.com/office/drawing/2014/main" id="{58C59A3E-2E4F-C599-D186-CA0231620C78}"/>
+              </a:ext>
+            </a:extLst>
+          </p:cNvPr>
+          <p:cNvCxnSpPr>
+            <a:cxnSpLocks/>
+          </p:cNvCxnSpPr>
+          <p:nvPr/>
+        </p:nvCxnSpPr>
+        <p:spPr>
+          <a:xfrm flipH="1">
+            <a:off x="1162756" y="2438399"/>
+            <a:ext cx="4031067" cy="0"/>
+          </a:xfrm>
+          <a:prstGeom prst="line">
+            <a:avLst/>
+          </a:prstGeom>
+          <a:ln>
+            <a:solidFill>
+              <a:srgbClr val="C00000"/>
+            </a:solidFill>
+          </a:ln>
+        </p:spPr>
+        <p:style>
+          <a:lnRef idx="2">
+            <a:schemeClr val="accent1"/>
+          </a:lnRef>
+          <a:fillRef idx="0">
+            <a:schemeClr val="accent1"/>
+          </a:fillRef>
+          <a:effectRef idx="1">
+            <a:schemeClr val="accent1"/>
+          </a:effectRef>
+          <a:fontRef idx="minor">
+            <a:schemeClr val="tx1"/>
+          </a:fontRef>
+        </p:style>
+      </p:cxnSp>
+      <p:sp>
+        <p:nvSpPr>
+          <p:cNvPr id="24" name="TextBox 23">
+            <a:extLst>
+              <a:ext uri="{FF2B5EF4-FFF2-40B4-BE49-F238E27FC236}">
+                <a16:creationId xmlns:a16="http://schemas.microsoft.com/office/drawing/2014/main" id="{94033C5E-752E-7457-8E23-575EB7409923}"/>
+              </a:ext>
+            </a:extLst>
+          </p:cNvPr>
+          <p:cNvSpPr txBox="1"/>
+          <p:nvPr/>
+        </p:nvSpPr>
+        <p:spPr>
+          <a:xfrm>
+            <a:off x="6707148" y="2572259"/>
+            <a:ext cx="2310248" cy="461665"/>
+          </a:xfrm>
+          <a:prstGeom prst="rect">
+            <a:avLst/>
+          </a:prstGeom>
+          <a:noFill/>
+        </p:spPr>
+        <p:txBody>
+          <a:bodyPr wrap="none" rtlCol="0">
+            <a:spAutoFit/>
+          </a:bodyPr>
+          <a:lstStyle/>
+          <a:p>
+            <a:r>
+              <a:rPr lang="ru-RU" sz="2400" dirty="0"/>
+              <a:t>Хаотичный шаг</a:t>
+            </a:r>
+            <a:endParaRPr lang="en-US" sz="2400" dirty="0"/>
+          </a:p>
+        </p:txBody>
+      </p:sp>
+    </p:spTree>
+    <p:extLst>
+      <p:ext uri="{BB962C8B-B14F-4D97-AF65-F5344CB8AC3E}">
+        <p14:creationId xmlns:p14="http://schemas.microsoft.com/office/powerpoint/2010/main" val="2808450256"/>
+      </p:ext>
+    </p:extLst>
+  </p:cSld>
+  <p:clrMapOvr>
+    <a:masterClrMapping/>
+  </p:clrMapOvr>
+</p:sld>
+</file>
+
+<file path=ppt/slides/slide2.xml><?xml version="1.0" encoding="utf-8"?>
+<p:sld xmlns:a="http://schemas.openxmlformats.org/drawingml/2006/main" xmlns:r="http://schemas.openxmlformats.org/officeDocument/2006/relationships" xmlns:p="http://schemas.openxmlformats.org/presentationml/2006/main">
+  <p:cSld>
+    <p:spTree>
+      <p:nvGrpSpPr>
+        <p:cNvPr id="1" name=""/>
+        <p:cNvGrpSpPr/>
+        <p:nvPr/>
+      </p:nvGrpSpPr>
+      <p:grpSpPr>
+        <a:xfrm>
+          <a:off x="0" y="0"/>
+          <a:ext cx="0" cy="0"/>
+          <a:chOff x="0" y="0"/>
+          <a:chExt cx="0" cy="0"/>
+        </a:xfrm>
+      </p:grpSpPr>
+      <p:sp>
+        <p:nvSpPr>
+          <p:cNvPr id="2" name="Заголовок 1">
+            <a:extLst>
+              <a:ext uri="{FF2B5EF4-FFF2-40B4-BE49-F238E27FC236}">
+                <a16:creationId xmlns:a16="http://schemas.microsoft.com/office/drawing/2014/main" id="{063DABDE-1979-0E88-26E9-520CE9939154}"/>
+              </a:ext>
+            </a:extLst>
+          </p:cNvPr>
+          <p:cNvSpPr>
+            <a:spLocks noGrp="1"/>
+          </p:cNvSpPr>
+          <p:nvPr>
+            <p:ph type="title"/>
+          </p:nvPr>
+        </p:nvSpPr>
+        <p:spPr>
+          <a:xfrm>
+            <a:off x="1063852" y="731159"/>
+            <a:ext cx="10080625" cy="1005566"/>
+          </a:xfrm>
+        </p:spPr>
+        <p:txBody>
+          <a:bodyPr>
+            <a:normAutofit/>
+          </a:bodyPr>
+          <a:lstStyle/>
+          <a:p>
+            <a:r>
+              <a:rPr lang="ru-RU" sz="3600" b="1" dirty="0">
+                <a:solidFill>
+                  <a:srgbClr val="246AF3"/>
+                </a:solidFill>
+              </a:rPr>
+              <a:t>Формулировка задачи</a:t>
+            </a:r>
+          </a:p>
+        </p:txBody>
+      </p:sp>
+      <p:pic>
+        <p:nvPicPr>
+          <p:cNvPr id="9" name="Picture 6" descr="Фрагмент">
+            <a:extLst>
+              <a:ext uri="{FF2B5EF4-FFF2-40B4-BE49-F238E27FC236}">
+                <a16:creationId xmlns:a16="http://schemas.microsoft.com/office/drawing/2014/main" id="{ADF16622-1C41-1D86-1579-527F8AB6E7EA}"/>
+              </a:ext>
+            </a:extLst>
+          </p:cNvPr>
+          <p:cNvPicPr>
+            <a:picLocks noChangeAspect="1"/>
+          </p:cNvPicPr>
+          <p:nvPr/>
+        </p:nvPicPr>
+        <p:blipFill>
+          <a:blip r:embed="rId3"/>
+          <a:stretch>
+            <a:fillRect/>
+          </a:stretch>
+        </p:blipFill>
+        <p:spPr>
+          <a:xfrm>
+            <a:off x="2960683" y="3559376"/>
+            <a:ext cx="5442780" cy="2910896"/>
+          </a:xfrm>
+          <a:prstGeom prst="rect">
+            <a:avLst/>
+          </a:prstGeom>
+        </p:spPr>
+      </p:pic>
+      <p:sp>
+        <p:nvSpPr>
+          <p:cNvPr id="3" name="TextBox 2">
+            <a:extLst>
+              <a:ext uri="{FF2B5EF4-FFF2-40B4-BE49-F238E27FC236}">
+                <a16:creationId xmlns:a16="http://schemas.microsoft.com/office/drawing/2014/main" id="{B586F106-D051-381C-CA7B-342C6291CD1B}"/>
+              </a:ext>
+            </a:extLst>
+          </p:cNvPr>
+          <p:cNvSpPr txBox="1"/>
+          <p:nvPr/>
+        </p:nvSpPr>
+        <p:spPr>
+          <a:xfrm>
+            <a:off x="11510319" y="6285606"/>
+            <a:ext cx="302741" cy="369332"/>
+          </a:xfrm>
+          <a:prstGeom prst="rect">
+            <a:avLst/>
+          </a:prstGeom>
+          <a:noFill/>
+        </p:spPr>
+        <p:txBody>
+          <a:bodyPr wrap="square" rtlCol="0">
+            <a:spAutoFit/>
+          </a:bodyPr>
+          <a:lstStyle/>
+          <a:p>
+            <a:fld id="{9C552BD2-5A63-4FC4-A35C-09FBB5EA732A}" type="slidenum">
+              <a:rPr lang="en-US" smtClean="0"/>
+              <a:t>2</a:t>
+            </a:fld>
+            <a:endParaRPr lang="en-US" dirty="0"/>
+          </a:p>
+        </p:txBody>
+      </p:sp>
+      <p:sp>
+        <p:nvSpPr>
+          <p:cNvPr id="5" name="TextBox 4">
+            <a:extLst>
+              <a:ext uri="{FF2B5EF4-FFF2-40B4-BE49-F238E27FC236}">
+                <a16:creationId xmlns:a16="http://schemas.microsoft.com/office/drawing/2014/main" id="{522033BB-7C66-891D-50DF-E3CE472537B8}"/>
+              </a:ext>
+            </a:extLst>
+          </p:cNvPr>
+          <p:cNvSpPr txBox="1"/>
+          <p:nvPr/>
+        </p:nvSpPr>
+        <p:spPr>
+          <a:xfrm>
+            <a:off x="1063852" y="1741519"/>
+            <a:ext cx="10072460" cy="907941"/>
+          </a:xfrm>
+          <a:prstGeom prst="rect">
+            <a:avLst/>
+          </a:prstGeom>
+          <a:noFill/>
+        </p:spPr>
+        <p:txBody>
+          <a:bodyPr wrap="square">
+            <a:spAutoFit/>
+          </a:bodyPr>
+          <a:lstStyle/>
+          <a:p>
+            <a:pPr>
+              <a:lnSpc>
+                <a:spcPct val="113000"/>
+              </a:lnSpc>
+            </a:pPr>
+            <a:r>
+              <a:rPr lang="ru-RU" sz="2400" dirty="0"/>
+              <a:t>Требуется построить траекторию для роя БПЛА, чтобы дроны за минимальное время  поразили несколько целей одновременно.</a:t>
+            </a:r>
+            <a:endParaRPr lang="en-US" sz="2400" dirty="0"/>
+          </a:p>
+        </p:txBody>
+      </p:sp>
+    </p:spTree>
+    <p:extLst>
+      <p:ext uri="{BB962C8B-B14F-4D97-AF65-F5344CB8AC3E}">
+        <p14:creationId xmlns:p14="http://schemas.microsoft.com/office/powerpoint/2010/main" val="3126516693"/>
+      </p:ext>
+    </p:extLst>
+  </p:cSld>
+  <p:clrMapOvr>
+    <a:masterClrMapping/>
+  </p:clrMapOvr>
+</p:sld>
+</file>
+
+<file path=ppt/slides/slide20.xml><?xml version="1.0" encoding="utf-8"?>
+<p:sld xmlns:a="http://schemas.openxmlformats.org/drawingml/2006/main" xmlns:r="http://schemas.openxmlformats.org/officeDocument/2006/relationships" xmlns:p="http://schemas.openxmlformats.org/presentationml/2006/main">
+  <p:cSld>
+    <p:spTree>
+      <p:nvGrpSpPr>
+        <p:cNvPr id="1" name="">
+          <a:extLst>
+            <a:ext uri="{FF2B5EF4-FFF2-40B4-BE49-F238E27FC236}">
               <a16:creationId xmlns:a16="http://schemas.microsoft.com/office/drawing/2014/main" id="{992526C0-2FA2-9047-308B-52939BD03A2A}"/>
             </a:ext>
           </a:extLst>
@@ -11060,7 +12103,7 @@
           <a:p>
             <a:fld id="{9C552BD2-5A63-4FC4-A35C-09FBB5EA732A}" type="slidenum">
               <a:rPr lang="en-US" smtClean="0"/>
-              <a:t>19</a:t>
+              <a:t>20</a:t>
             </a:fld>
             <a:endParaRPr lang="en-US" dirty="0"/>
           </a:p>
@@ -11109,183 +12152,7 @@
 </p:sld>
 </file>
 
-<file path=ppt/slides/slide2.xml><?xml version="1.0" encoding="utf-8"?>
-<p:sld xmlns:a="http://schemas.openxmlformats.org/drawingml/2006/main" xmlns:r="http://schemas.openxmlformats.org/officeDocument/2006/relationships" xmlns:p="http://schemas.openxmlformats.org/presentationml/2006/main">
-  <p:cSld>
-    <p:spTree>
-      <p:nvGrpSpPr>
-        <p:cNvPr id="1" name=""/>
-        <p:cNvGrpSpPr/>
-        <p:nvPr/>
-      </p:nvGrpSpPr>
-      <p:grpSpPr>
-        <a:xfrm>
-          <a:off x="0" y="0"/>
-          <a:ext cx="0" cy="0"/>
-          <a:chOff x="0" y="0"/>
-          <a:chExt cx="0" cy="0"/>
-        </a:xfrm>
-      </p:grpSpPr>
-      <p:sp>
-        <p:nvSpPr>
-          <p:cNvPr id="2" name="Заголовок 1">
-            <a:extLst>
-              <a:ext uri="{FF2B5EF4-FFF2-40B4-BE49-F238E27FC236}">
-                <a16:creationId xmlns:a16="http://schemas.microsoft.com/office/drawing/2014/main" id="{063DABDE-1979-0E88-26E9-520CE9939154}"/>
-              </a:ext>
-            </a:extLst>
-          </p:cNvPr>
-          <p:cNvSpPr>
-            <a:spLocks noGrp="1"/>
-          </p:cNvSpPr>
-          <p:nvPr>
-            <p:ph type="title"/>
-          </p:nvPr>
-        </p:nvSpPr>
-        <p:spPr>
-          <a:xfrm>
-            <a:off x="1063852" y="731159"/>
-            <a:ext cx="10080625" cy="1005566"/>
-          </a:xfrm>
-        </p:spPr>
-        <p:txBody>
-          <a:bodyPr>
-            <a:normAutofit/>
-          </a:bodyPr>
-          <a:lstStyle/>
-          <a:p>
-            <a:r>
-              <a:rPr lang="ru-RU" sz="3600" b="1" dirty="0">
-                <a:solidFill>
-                  <a:srgbClr val="246AF3"/>
-                </a:solidFill>
-              </a:rPr>
-              <a:t>Формулировка задачи</a:t>
-            </a:r>
-          </a:p>
-        </p:txBody>
-      </p:sp>
-      <p:pic>
-        <p:nvPicPr>
-          <p:cNvPr id="9" name="Picture 6" descr="Фрагмент">
-            <a:extLst>
-              <a:ext uri="{FF2B5EF4-FFF2-40B4-BE49-F238E27FC236}">
-                <a16:creationId xmlns:a16="http://schemas.microsoft.com/office/drawing/2014/main" id="{ADF16622-1C41-1D86-1579-527F8AB6E7EA}"/>
-              </a:ext>
-            </a:extLst>
-          </p:cNvPr>
-          <p:cNvPicPr>
-            <a:picLocks noChangeAspect="1"/>
-          </p:cNvPicPr>
-          <p:nvPr/>
-        </p:nvPicPr>
-        <p:blipFill>
-          <a:blip r:embed="rId3"/>
-          <a:stretch>
-            <a:fillRect/>
-          </a:stretch>
-        </p:blipFill>
-        <p:spPr>
-          <a:xfrm>
-            <a:off x="2960683" y="3559376"/>
-            <a:ext cx="5442780" cy="2910896"/>
-          </a:xfrm>
-          <a:prstGeom prst="rect">
-            <a:avLst/>
-          </a:prstGeom>
-        </p:spPr>
-      </p:pic>
-      <p:sp>
-        <p:nvSpPr>
-          <p:cNvPr id="3" name="TextBox 2">
-            <a:extLst>
-              <a:ext uri="{FF2B5EF4-FFF2-40B4-BE49-F238E27FC236}">
-                <a16:creationId xmlns:a16="http://schemas.microsoft.com/office/drawing/2014/main" id="{B586F106-D051-381C-CA7B-342C6291CD1B}"/>
-              </a:ext>
-            </a:extLst>
-          </p:cNvPr>
-          <p:cNvSpPr txBox="1"/>
-          <p:nvPr/>
-        </p:nvSpPr>
-        <p:spPr>
-          <a:xfrm>
-            <a:off x="11510319" y="6285606"/>
-            <a:ext cx="302741" cy="369332"/>
-          </a:xfrm>
-          <a:prstGeom prst="rect">
-            <a:avLst/>
-          </a:prstGeom>
-          <a:noFill/>
-        </p:spPr>
-        <p:txBody>
-          <a:bodyPr wrap="square" rtlCol="0">
-            <a:spAutoFit/>
-          </a:bodyPr>
-          <a:lstStyle/>
-          <a:p>
-            <a:fld id="{9C552BD2-5A63-4FC4-A35C-09FBB5EA732A}" type="slidenum">
-              <a:rPr lang="en-US" smtClean="0"/>
-              <a:t>2</a:t>
-            </a:fld>
-            <a:endParaRPr lang="en-US" dirty="0"/>
-          </a:p>
-        </p:txBody>
-      </p:sp>
-      <p:sp>
-        <p:nvSpPr>
-          <p:cNvPr id="5" name="TextBox 4">
-            <a:extLst>
-              <a:ext uri="{FF2B5EF4-FFF2-40B4-BE49-F238E27FC236}">
-                <a16:creationId xmlns:a16="http://schemas.microsoft.com/office/drawing/2014/main" id="{522033BB-7C66-891D-50DF-E3CE472537B8}"/>
-              </a:ext>
-            </a:extLst>
-          </p:cNvPr>
-          <p:cNvSpPr txBox="1"/>
-          <p:nvPr/>
-        </p:nvSpPr>
-        <p:spPr>
-          <a:xfrm>
-            <a:off x="1063852" y="1741519"/>
-            <a:ext cx="10072460" cy="907941"/>
-          </a:xfrm>
-          <a:prstGeom prst="rect">
-            <a:avLst/>
-          </a:prstGeom>
-          <a:noFill/>
-        </p:spPr>
-        <p:txBody>
-          <a:bodyPr wrap="square">
-            <a:spAutoFit/>
-          </a:bodyPr>
-          <a:lstStyle/>
-          <a:p>
-            <a:pPr>
-              <a:lnSpc>
-                <a:spcPct val="113000"/>
-              </a:lnSpc>
-            </a:pPr>
-            <a:r>
-              <a:rPr lang="ru-RU" sz="2400" dirty="0"/>
-              <a:t>Требуется построить траекторию для роя БПЛА, чтобы дроны за минимальное время  поразили несколько целей одновременно.</a:t>
-            </a:r>
-            <a:endParaRPr lang="en-US" sz="2400" dirty="0"/>
-          </a:p>
-        </p:txBody>
-      </p:sp>
-    </p:spTree>
-    <p:extLst>
-      <p:ext uri="{BB962C8B-B14F-4D97-AF65-F5344CB8AC3E}">
-        <p14:creationId xmlns:p14="http://schemas.microsoft.com/office/powerpoint/2010/main" val="3126516693"/>
-      </p:ext>
-    </p:extLst>
-  </p:cSld>
-  <p:clrMapOvr>
-    <a:masterClrMapping/>
-  </p:clrMapOvr>
-</p:sld>
-</file>
-
-<file path=ppt/slides/slide20.xml><?xml version="1.0" encoding="utf-8"?>
+<file path=ppt/slides/slide21.xml><?xml version="1.0" encoding="utf-8"?>
 <p:sld xmlns:a="http://schemas.openxmlformats.org/drawingml/2006/main" xmlns:r="http://schemas.openxmlformats.org/officeDocument/2006/relationships" xmlns:p="http://schemas.openxmlformats.org/presentationml/2006/main">
   <p:cSld>
     <p:spTree>
@@ -11338,7 +12205,7 @@
           <a:p>
             <a:fld id="{9C552BD2-5A63-4FC4-A35C-09FBB5EA732A}" type="slidenum">
               <a:rPr lang="en-US" smtClean="0"/>
-              <a:t>20</a:t>
+              <a:t>21</a:t>
             </a:fld>
             <a:endParaRPr lang="en-US" dirty="0"/>
           </a:p>
@@ -11388,7 +12255,7 @@
 </p:sld>
 </file>
 
-<file path=ppt/slides/slide21.xml><?xml version="1.0" encoding="utf-8"?>
+<file path=ppt/slides/slide22.xml><?xml version="1.0" encoding="utf-8"?>
 <p:sld xmlns:a="http://schemas.openxmlformats.org/drawingml/2006/main" xmlns:r="http://schemas.openxmlformats.org/officeDocument/2006/relationships" xmlns:p="http://schemas.openxmlformats.org/presentationml/2006/main">
   <p:cSld>
     <p:spTree>
@@ -11441,7 +12308,7 @@
           <a:p>
             <a:fld id="{9C552BD2-5A63-4FC4-A35C-09FBB5EA732A}" type="slidenum">
               <a:rPr lang="en-US" smtClean="0"/>
-              <a:t>21</a:t>
+              <a:t>22</a:t>
             </a:fld>
             <a:endParaRPr lang="en-US" dirty="0"/>
           </a:p>
@@ -11491,7 +12358,7 @@
 </p:sld>
 </file>
 
-<file path=ppt/slides/slide22.xml><?xml version="1.0" encoding="utf-8"?>
+<file path=ppt/slides/slide23.xml><?xml version="1.0" encoding="utf-8"?>
 <p:sld xmlns:a="http://schemas.openxmlformats.org/drawingml/2006/main" xmlns:r="http://schemas.openxmlformats.org/officeDocument/2006/relationships" xmlns:p="http://schemas.openxmlformats.org/presentationml/2006/main">
   <p:cSld>
     <p:spTree>
@@ -11544,7 +12411,7 @@
           <a:p>
             <a:fld id="{9C552BD2-5A63-4FC4-A35C-09FBB5EA732A}" type="slidenum">
               <a:rPr lang="en-US" smtClean="0"/>
-              <a:t>22</a:t>
+              <a:t>23</a:t>
             </a:fld>
             <a:endParaRPr lang="en-US" dirty="0"/>
           </a:p>
@@ -11594,7 +12461,7 @@
 </p:sld>
 </file>
 
-<file path=ppt/slides/slide23.xml><?xml version="1.0" encoding="utf-8"?>
+<file path=ppt/slides/slide24.xml><?xml version="1.0" encoding="utf-8"?>
 <p:sld xmlns:a="http://schemas.openxmlformats.org/drawingml/2006/main" xmlns:r="http://schemas.openxmlformats.org/officeDocument/2006/relationships" xmlns:p="http://schemas.openxmlformats.org/presentationml/2006/main">
   <p:cSld>
     <p:spTree>
@@ -11767,7 +12634,7 @@
           <a:p>
             <a:fld id="{9C552BD2-5A63-4FC4-A35C-09FBB5EA732A}" type="slidenum">
               <a:rPr lang="en-US" smtClean="0"/>
-              <a:t>23</a:t>
+              <a:t>24</a:t>
             </a:fld>
             <a:endParaRPr lang="en-US" dirty="0"/>
           </a:p>
@@ -11786,7 +12653,7 @@
 </p:sld>
 </file>
 
-<file path=ppt/slides/slide24.xml><?xml version="1.0" encoding="utf-8"?>
+<file path=ppt/slides/slide25.xml><?xml version="1.0" encoding="utf-8"?>
 <p:sld xmlns:a="http://schemas.openxmlformats.org/drawingml/2006/main" xmlns:r="http://schemas.openxmlformats.org/officeDocument/2006/relationships" xmlns:p="http://schemas.openxmlformats.org/presentationml/2006/main">
   <p:cSld>
     <p:spTree>
@@ -11846,8 +12713,8 @@
           </a:p>
         </p:txBody>
       </p:sp>
-      <mc:AlternateContent xmlns:mc="http://schemas.openxmlformats.org/markup-compatibility/2006">
-        <mc:Choice xmlns:a14="http://schemas.microsoft.com/office/drawing/2010/main" Requires="a14">
+      <mc:AlternateContent xmlns:mc="http://schemas.openxmlformats.org/markup-compatibility/2006" xmlns:a14="http://schemas.microsoft.com/office/drawing/2010/main">
+        <mc:Choice Requires="a14">
           <p:sp>
             <p:nvSpPr>
               <p:cNvPr id="3" name="Текст 2">
@@ -12264,7 +13131,7 @@
             </p:txBody>
           </p:sp>
         </mc:Choice>
-        <mc:Fallback>
+        <mc:Fallback xmlns="">
           <p:sp>
             <p:nvSpPr>
               <p:cNvPr id="3" name="Текст 2">
@@ -12339,7 +13206,7 @@
           <a:p>
             <a:fld id="{9C552BD2-5A63-4FC4-A35C-09FBB5EA732A}" type="slidenum">
               <a:rPr lang="en-US" smtClean="0"/>
-              <a:t>24</a:t>
+              <a:t>25</a:t>
             </a:fld>
             <a:endParaRPr lang="en-US" dirty="0"/>
           </a:p>
@@ -12358,7 +13225,438 @@
 </p:sld>
 </file>
 
-<file path=ppt/slides/slide25.xml><?xml version="1.0" encoding="utf-8"?>
+<file path=ppt/slides/slide26.xml><?xml version="1.0" encoding="utf-8"?>
+<p:sld xmlns:a="http://schemas.openxmlformats.org/drawingml/2006/main" xmlns:r="http://schemas.openxmlformats.org/officeDocument/2006/relationships" xmlns:p="http://schemas.openxmlformats.org/presentationml/2006/main">
+  <p:cSld>
+    <p:spTree>
+      <p:nvGrpSpPr>
+        <p:cNvPr id="1" name="">
+          <a:extLst>
+            <a:ext uri="{FF2B5EF4-FFF2-40B4-BE49-F238E27FC236}">
+              <a16:creationId xmlns:a16="http://schemas.microsoft.com/office/drawing/2014/main" id="{E215BDBC-5045-2726-D8E4-3143FC93D00F}"/>
+            </a:ext>
+          </a:extLst>
+        </p:cNvPr>
+        <p:cNvGrpSpPr/>
+        <p:nvPr/>
+      </p:nvGrpSpPr>
+      <p:grpSpPr>
+        <a:xfrm>
+          <a:off x="0" y="0"/>
+          <a:ext cx="0" cy="0"/>
+          <a:chOff x="0" y="0"/>
+          <a:chExt cx="0" cy="0"/>
+        </a:xfrm>
+      </p:grpSpPr>
+      <p:sp>
+        <p:nvSpPr>
+          <p:cNvPr id="2" name="Заголовок 1">
+            <a:extLst>
+              <a:ext uri="{FF2B5EF4-FFF2-40B4-BE49-F238E27FC236}">
+                <a16:creationId xmlns:a16="http://schemas.microsoft.com/office/drawing/2014/main" id="{7A5BCA25-B525-72C7-E37F-9D6DF6A69A95}"/>
+              </a:ext>
+            </a:extLst>
+          </p:cNvPr>
+          <p:cNvSpPr>
+            <a:spLocks noGrp="1"/>
+          </p:cNvSpPr>
+          <p:nvPr>
+            <p:ph type="title"/>
+          </p:nvPr>
+        </p:nvSpPr>
+        <p:spPr>
+          <a:xfrm>
+            <a:off x="1055688" y="728663"/>
+            <a:ext cx="10080625" cy="1008062"/>
+          </a:xfrm>
+        </p:spPr>
+        <p:txBody>
+          <a:bodyPr/>
+          <a:lstStyle/>
+          <a:p>
+            <a:r>
+              <a:rPr lang="ru-RU" sz="3600" b="1" dirty="0">
+                <a:solidFill>
+                  <a:srgbClr val="246AF3"/>
+                </a:solidFill>
+              </a:rPr>
+              <a:t>Сходимость</a:t>
+            </a:r>
+          </a:p>
+        </p:txBody>
+      </p:sp>
+      <p:sp>
+        <p:nvSpPr>
+          <p:cNvPr id="4" name="TextBox 3">
+            <a:extLst>
+              <a:ext uri="{FF2B5EF4-FFF2-40B4-BE49-F238E27FC236}">
+                <a16:creationId xmlns:a16="http://schemas.microsoft.com/office/drawing/2014/main" id="{E1E0EC66-86C0-6A00-AEB4-BB2ACF3B49A5}"/>
+              </a:ext>
+            </a:extLst>
+          </p:cNvPr>
+          <p:cNvSpPr txBox="1"/>
+          <p:nvPr/>
+        </p:nvSpPr>
+        <p:spPr>
+          <a:xfrm>
+            <a:off x="11510319" y="6277232"/>
+            <a:ext cx="438665" cy="377706"/>
+          </a:xfrm>
+          <a:prstGeom prst="rect">
+            <a:avLst/>
+          </a:prstGeom>
+          <a:noFill/>
+        </p:spPr>
+        <p:txBody>
+          <a:bodyPr wrap="square" rtlCol="0">
+            <a:spAutoFit/>
+          </a:bodyPr>
+          <a:lstStyle/>
+          <a:p>
+            <a:fld id="{9C552BD2-5A63-4FC4-A35C-09FBB5EA732A}" type="slidenum">
+              <a:rPr lang="en-US" smtClean="0"/>
+              <a:t>26</a:t>
+            </a:fld>
+            <a:endParaRPr lang="en-US" dirty="0"/>
+          </a:p>
+        </p:txBody>
+      </p:sp>
+      <p:pic>
+        <p:nvPicPr>
+          <p:cNvPr id="5" name="Рисунок 4">
+            <a:extLst>
+              <a:ext uri="{FF2B5EF4-FFF2-40B4-BE49-F238E27FC236}">
+                <a16:creationId xmlns:a16="http://schemas.microsoft.com/office/drawing/2014/main" id="{F2032927-6CA5-4304-76D6-33592F194896}"/>
+              </a:ext>
+            </a:extLst>
+          </p:cNvPr>
+          <p:cNvPicPr>
+            <a:picLocks noChangeAspect="1"/>
+          </p:cNvPicPr>
+          <p:nvPr/>
+        </p:nvPicPr>
+        <p:blipFill>
+          <a:blip r:embed="rId3"/>
+          <a:srcRect r="17170" b="2591"/>
+          <a:stretch>
+            <a:fillRect/>
+          </a:stretch>
+        </p:blipFill>
+        <p:spPr>
+          <a:xfrm>
+            <a:off x="2650707" y="2073472"/>
+            <a:ext cx="6646354" cy="4392613"/>
+          </a:xfrm>
+          <a:prstGeom prst="rect">
+            <a:avLst/>
+          </a:prstGeom>
+          <a:ln>
+            <a:noFill/>
+          </a:ln>
+        </p:spPr>
+      </p:pic>
+    </p:spTree>
+    <p:extLst>
+      <p:ext uri="{BB962C8B-B14F-4D97-AF65-F5344CB8AC3E}">
+        <p14:creationId xmlns:p14="http://schemas.microsoft.com/office/powerpoint/2010/main" val="2097368200"/>
+      </p:ext>
+    </p:extLst>
+  </p:cSld>
+  <p:clrMapOvr>
+    <a:masterClrMapping/>
+  </p:clrMapOvr>
+</p:sld>
+</file>
+
+<file path=ppt/slides/slide27.xml><?xml version="1.0" encoding="utf-8"?>
+<p:sld xmlns:a="http://schemas.openxmlformats.org/drawingml/2006/main" xmlns:r="http://schemas.openxmlformats.org/officeDocument/2006/relationships" xmlns:p="http://schemas.openxmlformats.org/presentationml/2006/main">
+  <p:cSld>
+    <p:bg>
+      <p:bgPr>
+        <a:solidFill>
+          <a:schemeClr val="bg1"/>
+        </a:solidFill>
+        <a:effectLst/>
+      </p:bgPr>
+    </p:bg>
+    <p:spTree>
+      <p:nvGrpSpPr>
+        <p:cNvPr id="1" name="">
+          <a:extLst>
+            <a:ext uri="{FF2B5EF4-FFF2-40B4-BE49-F238E27FC236}">
+              <a16:creationId xmlns:a16="http://schemas.microsoft.com/office/drawing/2014/main" id="{372123DA-8B7C-48AA-ECB5-8AEB1232F22E}"/>
+            </a:ext>
+          </a:extLst>
+        </p:cNvPr>
+        <p:cNvGrpSpPr/>
+        <p:nvPr/>
+      </p:nvGrpSpPr>
+      <p:grpSpPr>
+        <a:xfrm>
+          <a:off x="0" y="0"/>
+          <a:ext cx="0" cy="0"/>
+          <a:chOff x="0" y="0"/>
+          <a:chExt cx="0" cy="0"/>
+        </a:xfrm>
+      </p:grpSpPr>
+      <p:pic>
+        <p:nvPicPr>
+          <p:cNvPr id="23" name="Рисунок 22">
+            <a:extLst>
+              <a:ext uri="{FF2B5EF4-FFF2-40B4-BE49-F238E27FC236}">
+                <a16:creationId xmlns:a16="http://schemas.microsoft.com/office/drawing/2014/main" id="{A4606145-1F52-F171-A1FE-4BE2F0B0B7C4}"/>
+              </a:ext>
+            </a:extLst>
+          </p:cNvPr>
+          <p:cNvPicPr>
+            <a:picLocks noChangeAspect="1"/>
+          </p:cNvPicPr>
+          <p:nvPr/>
+        </p:nvPicPr>
+        <p:blipFill>
+          <a:blip r:embed="rId3">
+            <a:extLst>
+              <a:ext uri="{28A0092B-C50C-407E-A947-70E740481C1C}">
+                <a14:useLocalDpi xmlns:a14="http://schemas.microsoft.com/office/drawing/2010/main" val="0"/>
+              </a:ext>
+            </a:extLst>
+          </a:blip>
+          <a:stretch>
+            <a:fillRect/>
+          </a:stretch>
+        </p:blipFill>
+        <p:spPr>
+          <a:xfrm>
+            <a:off x="970281" y="643466"/>
+            <a:ext cx="2624663" cy="2624663"/>
+          </a:xfrm>
+          <a:prstGeom prst="rect">
+            <a:avLst/>
+          </a:prstGeom>
+        </p:spPr>
+      </p:pic>
+      <p:pic>
+        <p:nvPicPr>
+          <p:cNvPr id="30" name="Рисунок 29" descr="Picture background">
+            <a:extLst>
+              <a:ext uri="{FF2B5EF4-FFF2-40B4-BE49-F238E27FC236}">
+                <a16:creationId xmlns:a16="http://schemas.microsoft.com/office/drawing/2014/main" id="{DB84CD3A-E58E-9286-F45D-C1B4F1B693D8}"/>
+              </a:ext>
+            </a:extLst>
+          </p:cNvPr>
+          <p:cNvPicPr>
+            <a:picLocks noChangeAspect="1"/>
+          </p:cNvPicPr>
+          <p:nvPr/>
+        </p:nvPicPr>
+        <p:blipFill>
+          <a:blip r:embed="rId4"/>
+          <a:stretch>
+            <a:fillRect/>
+          </a:stretch>
+        </p:blipFill>
+        <p:spPr>
+          <a:xfrm>
+            <a:off x="4243493" y="1347472"/>
+            <a:ext cx="3743538" cy="1216649"/>
+          </a:xfrm>
+          <a:prstGeom prst="rect">
+            <a:avLst/>
+          </a:prstGeom>
+        </p:spPr>
+      </p:pic>
+      <p:pic>
+        <p:nvPicPr>
+          <p:cNvPr id="29" name="Рисунок 28" descr="Picture background">
+            <a:extLst>
+              <a:ext uri="{FF2B5EF4-FFF2-40B4-BE49-F238E27FC236}">
+                <a16:creationId xmlns:a16="http://schemas.microsoft.com/office/drawing/2014/main" id="{A65CD46F-4B4C-4874-9E0A-DB26CBD8FB89}"/>
+              </a:ext>
+            </a:extLst>
+          </p:cNvPr>
+          <p:cNvPicPr>
+            <a:picLocks noChangeAspect="1"/>
+          </p:cNvPicPr>
+          <p:nvPr/>
+        </p:nvPicPr>
+        <p:blipFill>
+          <a:blip r:embed="rId5"/>
+          <a:stretch>
+            <a:fillRect/>
+          </a:stretch>
+        </p:blipFill>
+        <p:spPr>
+          <a:xfrm>
+            <a:off x="8616317" y="643466"/>
+            <a:ext cx="2624662" cy="2624662"/>
+          </a:xfrm>
+          <a:prstGeom prst="rect">
+            <a:avLst/>
+          </a:prstGeom>
+        </p:spPr>
+      </p:pic>
+      <p:pic>
+        <p:nvPicPr>
+          <p:cNvPr id="19" name="Рисунок 18">
+            <a:extLst>
+              <a:ext uri="{FF2B5EF4-FFF2-40B4-BE49-F238E27FC236}">
+                <a16:creationId xmlns:a16="http://schemas.microsoft.com/office/drawing/2014/main" id="{7677B551-DEF0-2A6C-783F-A4DBCF4BBA39}"/>
+              </a:ext>
+            </a:extLst>
+          </p:cNvPr>
+          <p:cNvPicPr>
+            <a:picLocks noChangeAspect="1"/>
+          </p:cNvPicPr>
+          <p:nvPr/>
+        </p:nvPicPr>
+        <p:blipFill>
+          <a:blip r:embed="rId6">
+            <a:extLst>
+              <a:ext uri="{28A0092B-C50C-407E-A947-70E740481C1C}">
+                <a14:useLocalDpi xmlns:a14="http://schemas.microsoft.com/office/drawing/2010/main" val="0"/>
+              </a:ext>
+            </a:extLst>
+          </a:blip>
+          <a:stretch>
+            <a:fillRect/>
+          </a:stretch>
+        </p:blipFill>
+        <p:spPr>
+          <a:xfrm>
+            <a:off x="643467" y="4082622"/>
+            <a:ext cx="3278292" cy="1639146"/>
+          </a:xfrm>
+          <a:prstGeom prst="rect">
+            <a:avLst/>
+          </a:prstGeom>
+        </p:spPr>
+      </p:pic>
+      <p:pic>
+        <p:nvPicPr>
+          <p:cNvPr id="28" name="Рисунок 27">
+            <a:extLst>
+              <a:ext uri="{FF2B5EF4-FFF2-40B4-BE49-F238E27FC236}">
+                <a16:creationId xmlns:a16="http://schemas.microsoft.com/office/drawing/2014/main" id="{5EF574D2-64D8-A9A7-CD9C-5162E6527EC5}"/>
+              </a:ext>
+            </a:extLst>
+          </p:cNvPr>
+          <p:cNvPicPr>
+            <a:picLocks noChangeAspect="1"/>
+          </p:cNvPicPr>
+          <p:nvPr/>
+        </p:nvPicPr>
+        <p:blipFill>
+          <a:blip>
+            <a:extLst>
+              <a:ext uri="{96DAC541-7B7A-43D3-8B79-37D633B846F1}">
+                <asvg:svgBlip xmlns:asvg="http://schemas.microsoft.com/office/drawing/2016/SVG/main" r:embed="rId7"/>
+              </a:ext>
+            </a:extLst>
+          </a:blip>
+          <a:stretch>
+            <a:fillRect/>
+          </a:stretch>
+        </p:blipFill>
+        <p:spPr>
+          <a:xfrm>
+            <a:off x="4243494" y="4079962"/>
+            <a:ext cx="3743538" cy="1663794"/>
+          </a:xfrm>
+          <a:prstGeom prst="rect">
+            <a:avLst/>
+          </a:prstGeom>
+        </p:spPr>
+      </p:pic>
+      <p:pic>
+        <p:nvPicPr>
+          <p:cNvPr id="9" name="Рисунок 8">
+            <a:extLst>
+              <a:ext uri="{FF2B5EF4-FFF2-40B4-BE49-F238E27FC236}">
+                <a16:creationId xmlns:a16="http://schemas.microsoft.com/office/drawing/2014/main" id="{FF2FD33C-0494-0FD1-F45D-6679BFFCA8E6}"/>
+              </a:ext>
+            </a:extLst>
+          </p:cNvPr>
+          <p:cNvPicPr>
+            <a:picLocks noChangeAspect="1"/>
+          </p:cNvPicPr>
+          <p:nvPr/>
+        </p:nvPicPr>
+        <p:blipFill>
+          <a:blip r:embed="rId8"/>
+          <a:stretch>
+            <a:fillRect/>
+          </a:stretch>
+        </p:blipFill>
+        <p:spPr>
+          <a:xfrm>
+            <a:off x="8752071" y="3589863"/>
+            <a:ext cx="2353152" cy="2643992"/>
+          </a:xfrm>
+          <a:prstGeom prst="rect">
+            <a:avLst/>
+          </a:prstGeom>
+        </p:spPr>
+      </p:pic>
+      <p:sp>
+        <p:nvSpPr>
+          <p:cNvPr id="4" name="TextBox 3">
+            <a:extLst>
+              <a:ext uri="{FF2B5EF4-FFF2-40B4-BE49-F238E27FC236}">
+                <a16:creationId xmlns:a16="http://schemas.microsoft.com/office/drawing/2014/main" id="{59BE9580-DF3C-07A5-6AD6-D9A47F9627A3}"/>
+              </a:ext>
+            </a:extLst>
+          </p:cNvPr>
+          <p:cNvSpPr txBox="1"/>
+          <p:nvPr/>
+        </p:nvSpPr>
+        <p:spPr>
+          <a:xfrm>
+            <a:off x="11510319" y="6277232"/>
+            <a:ext cx="438665" cy="377706"/>
+          </a:xfrm>
+          <a:prstGeom prst="rect">
+            <a:avLst/>
+          </a:prstGeom>
+          <a:noFill/>
+        </p:spPr>
+        <p:txBody>
+          <a:bodyPr wrap="square" rtlCol="0">
+            <a:spAutoFit/>
+          </a:bodyPr>
+          <a:lstStyle/>
+          <a:p>
+            <a:pPr>
+              <a:spcAft>
+                <a:spcPts val="600"/>
+              </a:spcAft>
+            </a:pPr>
+            <a:fld id="{9C552BD2-5A63-4FC4-A35C-09FBB5EA732A}" type="slidenum">
+              <a:rPr lang="en-US" smtClean="0"/>
+              <a:pPr>
+                <a:spcAft>
+                  <a:spcPts val="600"/>
+                </a:spcAft>
+              </a:pPr>
+              <a:t>27</a:t>
+            </a:fld>
+            <a:endParaRPr lang="en-US"/>
+          </a:p>
+        </p:txBody>
+      </p:sp>
+    </p:spTree>
+    <p:extLst>
+      <p:ext uri="{BB962C8B-B14F-4D97-AF65-F5344CB8AC3E}">
+        <p14:creationId xmlns:p14="http://schemas.microsoft.com/office/powerpoint/2010/main" val="51938538"/>
+      </p:ext>
+    </p:extLst>
+  </p:cSld>
+  <p:clrMapOvr>
+    <a:masterClrMapping/>
+  </p:clrMapOvr>
+</p:sld>
+</file>
+
+<file path=ppt/slides/slide28.xml><?xml version="1.0" encoding="utf-8"?>
 <p:sld xmlns:a="http://schemas.openxmlformats.org/drawingml/2006/main" xmlns:r="http://schemas.openxmlformats.org/officeDocument/2006/relationships" xmlns:p="http://schemas.openxmlformats.org/presentationml/2006/main">
   <p:cSld>
     <p:spTree>
@@ -12522,7 +13820,7 @@
           <a:p>
             <a:fld id="{9C552BD2-5A63-4FC4-A35C-09FBB5EA732A}" type="slidenum">
               <a:rPr lang="en-US" smtClean="0"/>
-              <a:t>25</a:t>
+              <a:t>28</a:t>
             </a:fld>
             <a:endParaRPr lang="en-US" dirty="0"/>
           </a:p>
@@ -12541,7 +13839,7 @@
 </p:sld>
 </file>
 
-<file path=ppt/slides/slide26.xml><?xml version="1.0" encoding="utf-8"?>
+<file path=ppt/slides/slide29.xml><?xml version="1.0" encoding="utf-8"?>
 <p:sld xmlns:a="http://schemas.openxmlformats.org/drawingml/2006/main" xmlns:r="http://schemas.openxmlformats.org/officeDocument/2006/relationships" xmlns:p="http://schemas.openxmlformats.org/presentationml/2006/main">
   <p:cSld>
     <p:spTree>
